--- a/квиз клуб продавцов/Квиз_Клуб_продавцов_Отработка_возражений.pptx
+++ b/квиз клуб продавцов/Квиз_Клуб_продавцов_Отработка_возражений.pptx
@@ -6651,8 +6651,8 @@
         </p:nvSpPr>
         <p:spPr>
           <a:xfrm>
-            <a:off x="502920" y="1097280"/>
-            <a:ext cx="8778240" cy="3063240"/>
+            <a:off x="502920" y="1051560"/>
+            <a:ext cx="8778240" cy="3246120"/>
           </a:xfrm>
           <a:prstGeom prst="roundRect">
             <a:avLst>
@@ -6681,7 +6681,7 @@
           </a:fontRef>
         </p:style>
         <p:txBody>
-          <a:bodyPr rtlCol="0" anchor="t" wrap="square" lIns="137160" rIns="137160" tIns="91440"/>
+          <a:bodyPr rtlCol="0" anchor="t" wrap="square" lIns="128016" rIns="128016" tIns="73152" bIns="73152"/>
           <a:lstStyle/>
           <a:p>
             <a:pPr algn="l"/>
@@ -6700,11 +6700,11 @@
           <a:p>
             <a:pPr algn="l">
               <a:spcBef>
-                <a:spcPts val="600"/>
+                <a:spcPts val="500"/>
               </a:spcBef>
             </a:pPr>
             <a:r>
-              <a:rPr sz="1300" b="0">
+              <a:rPr sz="1200" b="0">
                 <a:solidFill>
                   <a:srgbClr val="FFFFFF"/>
                 </a:solidFill>
@@ -6712,17 +6712,19 @@
                 <a:ea typeface="Verdana"/>
                 <a:cs typeface="Verdana"/>
               </a:rPr>
-              <a:t>Оптовая компания хочет мобильных торговых агентов (заказы с планшета в 1С). Сезон высокий, отдел продаж перегружен.</a:t>
+              <a:t>Компания: «ТайгаТрейд» — опт продуктов питания, высокий сезон (май–сентябрь).
+ЛПР на встрече: Дмитрий Панов, руководитель отдела продаж.
+Ситуация: агенты в полях принимают заказы в мессенджерах, потом вручную бьют в 1С — путают цены и остатки. Дмитрий хочет мобильных агентов.</a:t>
             </a:r>
           </a:p>
           <a:p>
             <a:pPr algn="l">
               <a:spcBef>
-                <a:spcPts val="600"/>
+                <a:spcPts val="500"/>
               </a:spcBef>
             </a:pPr>
             <a:r>
-              <a:rPr sz="1300" b="0">
+              <a:rPr sz="1200" b="0">
                 <a:solidFill>
                   <a:srgbClr val="FFFFFF"/>
                 </a:solidFill>
@@ -6730,7 +6732,7 @@
                 <a:ea typeface="Verdana"/>
                 <a:cs typeface="Verdana"/>
               </a:rPr>
-              <a:t>Возражение: «Сейчас сезон, вернёмся осенью».</a:t>
+              <a:t>Возражение Дмитрия: «Сейчас сезон, всем не до внедрения. Вернёмся осенью».</a:t>
             </a:r>
           </a:p>
         </p:txBody>
@@ -6743,8 +6745,8 @@
         </p:nvSpPr>
         <p:spPr>
           <a:xfrm>
-            <a:off x="640080" y="4251960"/>
-            <a:ext cx="8503920" cy="411480"/>
+            <a:off x="640080" y="4370832"/>
+            <a:ext cx="8503920" cy="365760"/>
           </a:xfrm>
           <a:prstGeom prst="rect">
             <a:avLst/>
@@ -6759,7 +6761,7 @@
           <a:p>
             <a:pPr algn="l"/>
             <a:r>
-              <a:rPr sz="1200" b="1">
+              <a:rPr sz="1100" b="1">
                 <a:solidFill>
                   <a:srgbClr val="F0B42E"/>
                 </a:solidFill>
@@ -6767,7 +6769,7 @@
                 <a:ea typeface="Verdana"/>
                 <a:cs typeface="Verdana"/>
               </a:rPr>
-              <a:t>Задача: Свяжите сезон с ценностью и удержите движение к покупке.</a:t>
+              <a:t>Задача: Свяжите сезон с ценностью решения и удержите движение к покупке.</a:t>
             </a:r>
           </a:p>
         </p:txBody>
@@ -6780,8 +6782,8 @@
         </p:nvSpPr>
         <p:spPr>
           <a:xfrm>
-            <a:off x="502920" y="4709160"/>
-            <a:ext cx="8778240" cy="1325880"/>
+            <a:off x="502920" y="4754880"/>
+            <a:ext cx="8778240" cy="1234440"/>
           </a:xfrm>
           <a:prstGeom prst="roundRect">
             <a:avLst>
@@ -6841,7 +6843,7 @@
                 <a:ea typeface="Verdana"/>
                 <a:cs typeface="Verdana"/>
               </a:rPr>
-              <a:t>Показать стоимость ручных заказов именно в сезон; предложить лёгкий старт (пилотные агенты); забронировать слот внедрения на спад с предоплатой/договором сейчас.</a:t>
+              <a:t>Показать стоимость ошибок именно в сезон; пилот на 3–5 агентах; договор/предоплата сейчас + слот внедрения на спад сезона.</a:t>
             </a:r>
           </a:p>
         </p:txBody>
@@ -7210,8 +7212,8 @@
         </p:nvSpPr>
         <p:spPr>
           <a:xfrm>
-            <a:off x="502920" y="1097280"/>
-            <a:ext cx="8778240" cy="3063240"/>
+            <a:off x="502920" y="1051560"/>
+            <a:ext cx="8778240" cy="3246120"/>
           </a:xfrm>
           <a:prstGeom prst="roundRect">
             <a:avLst>
@@ -7240,7 +7242,7 @@
           </a:fontRef>
         </p:style>
         <p:txBody>
-          <a:bodyPr rtlCol="0" anchor="t" wrap="square" lIns="137160" rIns="137160" tIns="91440"/>
+          <a:bodyPr rtlCol="0" anchor="t" wrap="square" lIns="128016" rIns="128016" tIns="73152" bIns="73152"/>
           <a:lstStyle/>
           <a:p>
             <a:pPr algn="l"/>
@@ -7259,11 +7261,11 @@
           <a:p>
             <a:pPr algn="l">
               <a:spcBef>
-                <a:spcPts val="600"/>
+                <a:spcPts val="500"/>
               </a:spcBef>
             </a:pPr>
             <a:r>
-              <a:rPr sz="1300" b="0">
+              <a:rPr sz="1200" b="0">
                 <a:solidFill>
                   <a:srgbClr val="FFFFFF"/>
                 </a:solidFill>
@@ -7271,17 +7273,19 @@
                 <a:ea typeface="Verdana"/>
                 <a:cs typeface="Verdana"/>
               </a:rPr>
-              <a:t>После демо 1С:ЗУП HR и главбух «за». Вы ждёте решения.</a:t>
+              <a:t>Компания: клиника «Айсберг» — 2 филиала, 180 сотрудников.
+ЛПР на встрече: Юлия Старцева, HR-директор; на демо был главбух.
+Ситуация: демо 1С:ЗУП прошло отлично — оба “за”. Вы ждёте решения по лицензиям и проекту.</a:t>
             </a:r>
           </a:p>
           <a:p>
             <a:pPr algn="l">
               <a:spcBef>
-                <a:spcPts val="600"/>
+                <a:spcPts val="500"/>
               </a:spcBef>
             </a:pPr>
             <a:r>
-              <a:rPr sz="1300" b="0">
+              <a:rPr sz="1200" b="0">
                 <a:solidFill>
                   <a:srgbClr val="FFFFFF"/>
                 </a:solidFill>
@@ -7289,7 +7293,7 @@
                 <a:ea typeface="Verdana"/>
                 <a:cs typeface="Verdana"/>
               </a:rPr>
-              <a:t>Возражение: «Надо посоветоваться с командой» — и тишина 10 дней.</a:t>
+              <a:t>Возражение (в переписке): «Надо посоветоваться с командой» — и 10 дней тишины. Звонки сбрасывают, в почте — прочитано.</a:t>
             </a:r>
           </a:p>
         </p:txBody>
@@ -7302,8 +7306,8 @@
         </p:nvSpPr>
         <p:spPr>
           <a:xfrm>
-            <a:off x="640080" y="4251960"/>
-            <a:ext cx="8503920" cy="411480"/>
+            <a:off x="640080" y="4370832"/>
+            <a:ext cx="8503920" cy="365760"/>
           </a:xfrm>
           <a:prstGeom prst="rect">
             <a:avLst/>
@@ -7318,7 +7322,7 @@
           <a:p>
             <a:pPr algn="l"/>
             <a:r>
-              <a:rPr sz="1200" b="1">
+              <a:rPr sz="1100" b="1">
                 <a:solidFill>
                   <a:srgbClr val="F0B42E"/>
                 </a:solidFill>
@@ -7326,7 +7330,7 @@
                 <a:ea typeface="Verdana"/>
                 <a:cs typeface="Verdana"/>
               </a:rPr>
-              <a:t>Задача: Верните контакт и доведите до следующего шага покупки.</a:t>
+              <a:t>Задача: Верните контакт, вскройте истинную причину паузы и доведите до шага покупки.</a:t>
             </a:r>
           </a:p>
         </p:txBody>
@@ -7339,8 +7343,8 @@
         </p:nvSpPr>
         <p:spPr>
           <a:xfrm>
-            <a:off x="502920" y="4709160"/>
-            <a:ext cx="8778240" cy="1325880"/>
+            <a:off x="502920" y="4754880"/>
+            <a:ext cx="8778240" cy="1234440"/>
           </a:xfrm>
           <a:prstGeom prst="roundRect">
             <a:avLst>
@@ -7400,7 +7404,7 @@
                 <a:ea typeface="Verdana"/>
                 <a:cs typeface="Verdana"/>
               </a:rPr>
-              <a:t>Мягкий follow-up с ценностью (не «ну как там?»); выявить, кто ещё в круге решения; предложить мини-встречу с возражениями команды; дать дедлайн по слоту/акции без давления.</a:t>
+              <a:t>Follow-up с ценностью, не давлением; выяснить, кто ещё в круге решения; мини-встреча “разбор возражений команды”; мягкий дедлайн по слоту.</a:t>
             </a:r>
           </a:p>
         </p:txBody>
@@ -7769,8 +7773,8 @@
         </p:nvSpPr>
         <p:spPr>
           <a:xfrm>
-            <a:off x="502920" y="1097280"/>
-            <a:ext cx="8778240" cy="3063240"/>
+            <a:off x="502920" y="1051560"/>
+            <a:ext cx="8778240" cy="3246120"/>
           </a:xfrm>
           <a:prstGeom prst="roundRect">
             <a:avLst>
@@ -7799,7 +7803,7 @@
           </a:fontRef>
         </p:style>
         <p:txBody>
-          <a:bodyPr rtlCol="0" anchor="t" wrap="square" lIns="137160" rIns="137160" tIns="91440"/>
+          <a:bodyPr rtlCol="0" anchor="t" wrap="square" lIns="128016" rIns="128016" tIns="73152" bIns="73152"/>
           <a:lstStyle/>
           <a:p>
             <a:pPr algn="l"/>
@@ -7818,11 +7822,11 @@
           <a:p>
             <a:pPr algn="l">
               <a:spcBef>
-                <a:spcPts val="600"/>
+                <a:spcPts val="500"/>
               </a:spcBef>
             </a:pPr>
             <a:r>
-              <a:rPr sz="1300" b="0">
+              <a:rPr sz="1200" b="0">
                 <a:solidFill>
                   <a:srgbClr val="FFFFFF"/>
                 </a:solidFill>
@@ -7830,17 +7834,19 @@
                 <a:ea typeface="Verdana"/>
                 <a:cs typeface="Verdana"/>
               </a:rPr>
-              <a:t>Ритейл хочет онлайн-кассы + связку с 1С. Тема горячая из-за требований учёта.</a:t>
+              <a:t>Компания: сеть «ДомУют» — DIY-ритейл, 7 магазинов.
+ЛПР на встрече: Павел Громов, операционный директор.
+Ситуация: готовят связку онлайн-касс с 1С, тема горячая из‑за учёта и чеков. Параллельно ждут выездную налоговую проверку по одному юрлицу.</a:t>
             </a:r>
           </a:p>
           <a:p>
             <a:pPr algn="l">
               <a:spcBef>
-                <a:spcPts val="600"/>
+                <a:spcPts val="500"/>
               </a:spcBef>
             </a:pPr>
             <a:r>
-              <a:rPr sz="1300" b="0">
+              <a:rPr sz="1200" b="0">
                 <a:solidFill>
                   <a:srgbClr val="FFFFFF"/>
                 </a:solidFill>
@@ -7848,7 +7854,7 @@
                 <a:ea typeface="Verdana"/>
                 <a:cs typeface="Verdana"/>
               </a:rPr>
-              <a:t>Возражение: «Сначала переживём проверку, потом софт».</a:t>
+              <a:t>Возражение Павла: «Сначала переживём проверку — потом любой софт. Сейчас только не раскачивать лодку».</a:t>
             </a:r>
           </a:p>
         </p:txBody>
@@ -7861,8 +7867,8 @@
         </p:nvSpPr>
         <p:spPr>
           <a:xfrm>
-            <a:off x="640080" y="4251960"/>
-            <a:ext cx="8503920" cy="411480"/>
+            <a:off x="640080" y="4370832"/>
+            <a:ext cx="8503920" cy="365760"/>
           </a:xfrm>
           <a:prstGeom prst="rect">
             <a:avLst/>
@@ -7877,7 +7883,7 @@
           <a:p>
             <a:pPr algn="l"/>
             <a:r>
-              <a:rPr sz="1200" b="1">
+              <a:rPr sz="1100" b="1">
                 <a:solidFill>
                   <a:srgbClr val="F0B42E"/>
                 </a:solidFill>
@@ -7885,7 +7891,7 @@
                 <a:ea typeface="Verdana"/>
                 <a:cs typeface="Verdana"/>
               </a:rPr>
-              <a:t>Задача: Отработайте отсрочку «после проверки» и приведите к старту.</a:t>
+              <a:t>Задача: Отработайте отсрочку “после проверки” и предложите безопасный старт покупки.</a:t>
             </a:r>
           </a:p>
         </p:txBody>
@@ -7898,8 +7904,8 @@
         </p:nvSpPr>
         <p:spPr>
           <a:xfrm>
-            <a:off x="502920" y="4709160"/>
-            <a:ext cx="8778240" cy="1325880"/>
+            <a:off x="502920" y="4754880"/>
+            <a:ext cx="8778240" cy="1234440"/>
           </a:xfrm>
           <a:prstGeom prst="roundRect">
             <a:avLst>
@@ -7959,7 +7965,7 @@
                 <a:ea typeface="Verdana"/>
                 <a:cs typeface="Verdana"/>
               </a:rPr>
-              <a:t>Показать, что хаос учёта увеличивает риск на проверке; предложить минимальный контур «быстрых побед» до/параллельно проверке; развести срочное (кассы/чеки) и развитие.</a:t>
+              <a:t>Показать риск хаоса учёта на проверке; минимальный контур быстрых побед; развести срочное (кассы/чеки) и развитие; маленький договор на этап 1.</a:t>
             </a:r>
           </a:p>
         </p:txBody>
@@ -8328,8 +8334,8 @@
         </p:nvSpPr>
         <p:spPr>
           <a:xfrm>
-            <a:off x="502920" y="1097280"/>
-            <a:ext cx="8778240" cy="3063240"/>
+            <a:off x="502920" y="1051560"/>
+            <a:ext cx="8778240" cy="3246120"/>
           </a:xfrm>
           <a:prstGeom prst="roundRect">
             <a:avLst>
@@ -8358,7 +8364,7 @@
           </a:fontRef>
         </p:style>
         <p:txBody>
-          <a:bodyPr rtlCol="0" anchor="t" wrap="square" lIns="137160" rIns="137160" tIns="91440"/>
+          <a:bodyPr rtlCol="0" anchor="t" wrap="square" lIns="128016" rIns="128016" tIns="73152" bIns="73152"/>
           <a:lstStyle/>
           <a:p>
             <a:pPr algn="l"/>
@@ -8377,11 +8383,11 @@
           <a:p>
             <a:pPr algn="l">
               <a:spcBef>
-                <a:spcPts val="600"/>
+                <a:spcPts val="500"/>
               </a:spcBef>
             </a:pPr>
             <a:r>
-              <a:rPr sz="1300" b="0">
+              <a:rPr sz="1100" b="0">
                 <a:solidFill>
                   <a:srgbClr val="FFFFFF"/>
                 </a:solidFill>
@@ -8389,17 +8395,19 @@
                 <a:ea typeface="Verdana"/>
                 <a:cs typeface="Verdana"/>
               </a:rPr>
-              <a:t>После согласования цены клиент почти готов к 1С, но меняет процесс.</a:t>
+              <a:t>Компания: «МедСервис Байкал» — дистрибуция расходников для клиник.
+ЛПР на встрече: Артём Власов, генеральный директор.
+Ситуация: цена 1С:УТ согласована, Артём устно сказал «берём». Через неделю на созвоне новая позиция: компания входит в M&amp;A — их хочет купить федеральный дистрибутор. Юристы и инвесторы просят “ничего не подписывать до сделки”.</a:t>
             </a:r>
           </a:p>
           <a:p>
             <a:pPr algn="l">
               <a:spcBef>
-                <a:spcPts val="600"/>
+                <a:spcPts val="500"/>
               </a:spcBef>
             </a:pPr>
             <a:r>
-              <a:rPr sz="1300" b="0">
+              <a:rPr sz="1100" b="0">
                 <a:solidFill>
                   <a:srgbClr val="FFFFFF"/>
                 </a:solidFill>
@@ -8407,7 +8415,7 @@
                 <a:ea typeface="Verdana"/>
                 <a:cs typeface="Verdana"/>
               </a:rPr>
-              <a:t>Возражение: «Сначала сделайте бесплатный аудит всех процессов на 2 недели — и только по результатам решим, покупать или нет».</a:t>
+              <a:t>Возражение Артёма: «До закрытия сделки M&amp;A (через 3–5 месяцев) договор на внедрение не подпишем. Но можете бесплатно помочь с due diligence по нашей 1С — вам же потом внедрять».</a:t>
             </a:r>
           </a:p>
         </p:txBody>
@@ -8420,8 +8428,8 @@
         </p:nvSpPr>
         <p:spPr>
           <a:xfrm>
-            <a:off x="640080" y="4251960"/>
-            <a:ext cx="8503920" cy="411480"/>
+            <a:off x="640080" y="4370832"/>
+            <a:ext cx="8503920" cy="365760"/>
           </a:xfrm>
           <a:prstGeom prst="rect">
             <a:avLst/>
@@ -8436,7 +8444,7 @@
           <a:p>
             <a:pPr algn="l"/>
             <a:r>
-              <a:rPr sz="1200" b="1">
+              <a:rPr sz="1100" b="1">
                 <a:solidFill>
                   <a:srgbClr val="F0B42E"/>
                 </a:solidFill>
@@ -8444,7 +8452,7 @@
                 <a:ea typeface="Verdana"/>
                 <a:cs typeface="Verdana"/>
               </a:rPr>
-              <a:t>Задача: Отработайте требование бесплатного аудита и приведите к оплачиваемому шагу.</a:t>
+              <a:t>Задача: Отработайте паузу из‑за M&amp;A и требование бесплатной работы — выйдите на оплачиваемый/фиксирующий шаг.</a:t>
             </a:r>
           </a:p>
         </p:txBody>
@@ -8457,8 +8465,8 @@
         </p:nvSpPr>
         <p:spPr>
           <a:xfrm>
-            <a:off x="502920" y="4709160"/>
-            <a:ext cx="8778240" cy="1325880"/>
+            <a:off x="502920" y="4754880"/>
+            <a:ext cx="8778240" cy="1234440"/>
           </a:xfrm>
           <a:prstGeom prst="roundRect">
             <a:avLst>
@@ -8518,7 +8526,7 @@
                 <a:ea typeface="Verdana"/>
                 <a:cs typeface="Verdana"/>
               </a:rPr>
-              <a:t>Сузить аудит до 1–2 процессов / 2–3 дней; сделать его платным с зачётом в проект; дать осязаемый артефакт (карта болей + оценка); не отдавать 2 недели экспертизы «в никуда».</a:t>
+              <a:t>Не работать due diligence бесплатно “в никуда”; предложить платный пакет аудита с зачётом покупателю/новому контуру; NDA + hold-договор с опцией старта; квалифицировать, жива ли сделка после M&amp;A.</a:t>
             </a:r>
           </a:p>
         </p:txBody>
@@ -8887,8 +8895,8 @@
         </p:nvSpPr>
         <p:spPr>
           <a:xfrm>
-            <a:off x="502920" y="1097280"/>
-            <a:ext cx="8778240" cy="3063240"/>
+            <a:off x="502920" y="1051560"/>
+            <a:ext cx="8778240" cy="3246120"/>
           </a:xfrm>
           <a:prstGeom prst="roundRect">
             <a:avLst>
@@ -8917,7 +8925,7 @@
           </a:fontRef>
         </p:style>
         <p:txBody>
-          <a:bodyPr rtlCol="0" anchor="t" wrap="square" lIns="137160" rIns="137160" tIns="91440"/>
+          <a:bodyPr rtlCol="0" anchor="t" wrap="square" lIns="128016" rIns="128016" tIns="73152" bIns="73152"/>
           <a:lstStyle/>
           <a:p>
             <a:pPr algn="l"/>
@@ -8936,11 +8944,11 @@
           <a:p>
             <a:pPr algn="l">
               <a:spcBef>
-                <a:spcPts val="600"/>
+                <a:spcPts val="500"/>
               </a:spcBef>
             </a:pPr>
             <a:r>
-              <a:rPr sz="1300" b="0">
+              <a:rPr sz="1200" b="0">
                 <a:solidFill>
                   <a:srgbClr val="FFFFFF"/>
                 </a:solidFill>
@@ -8948,17 +8956,19 @@
                 <a:ea typeface="Verdana"/>
                 <a:cs typeface="Verdana"/>
               </a:rPr>
-              <a:t>Стратегический клиент на финале выбора вас как интегратора 1С. Устно «всё решили».</a:t>
+              <a:t>Компания: «НордМайн» — добыча и сервис, стратегический аккаунт для вас.
+ЛПР на встрече: Виктор Алексеев, директор по цифровой трансформации.
+Ситуация: вы на финале выбора интегратора 1С:ERP. Виктор говорит: «Победили». Но в письме — особые условия старта.</a:t>
             </a:r>
           </a:p>
           <a:p>
             <a:pPr algn="l">
               <a:spcBef>
-                <a:spcPts val="600"/>
+                <a:spcPts val="500"/>
               </a:spcBef>
             </a:pPr>
             <a:r>
-              <a:rPr sz="1300" b="0">
+              <a:rPr sz="1200" b="0">
                 <a:solidFill>
                   <a:srgbClr val="FFFFFF"/>
                 </a:solidFill>
@@ -8966,7 +8976,7 @@
                 <a:ea typeface="Verdana"/>
                 <a:cs typeface="Verdana"/>
               </a:rPr>
-              <a:t>Возражение: «Старт через 9 месяцев, без предоплаты и без брони команды — просто держите нас в уме».</a:t>
+              <a:t>Возражение Виктора: «Старт через 9 месяцев. Без предоплаты и без брони команды — просто держите нас в приоритете. Мы же стратегические».</a:t>
             </a:r>
           </a:p>
         </p:txBody>
@@ -8979,8 +8989,8 @@
         </p:nvSpPr>
         <p:spPr>
           <a:xfrm>
-            <a:off x="640080" y="4251960"/>
-            <a:ext cx="8503920" cy="411480"/>
+            <a:off x="640080" y="4370832"/>
+            <a:ext cx="8503920" cy="365760"/>
           </a:xfrm>
           <a:prstGeom prst="rect">
             <a:avLst/>
@@ -8995,7 +9005,7 @@
           <a:p>
             <a:pPr algn="l"/>
             <a:r>
-              <a:rPr sz="1200" b="1">
+              <a:rPr sz="1100" b="1">
                 <a:solidFill>
                   <a:srgbClr val="F0B42E"/>
                 </a:solidFill>
@@ -9003,7 +9013,7 @@
                 <a:ea typeface="Verdana"/>
                 <a:cs typeface="Verdana"/>
               </a:rPr>
-              <a:t>Задача: Зафиксируйте обязательства сторон или честно квалифицируйте отказ.</a:t>
+              <a:t>Задача: Зафиксируйте взаимные обязательства или честно выведите сделку из иллюзии.</a:t>
             </a:r>
           </a:p>
         </p:txBody>
@@ -9016,8 +9026,8 @@
         </p:nvSpPr>
         <p:spPr>
           <a:xfrm>
-            <a:off x="502920" y="4709160"/>
-            <a:ext cx="8778240" cy="1325880"/>
+            <a:off x="502920" y="4754880"/>
+            <a:ext cx="8778240" cy="1234440"/>
           </a:xfrm>
           <a:prstGeom prst="roundRect">
             <a:avLst>
@@ -9077,7 +9087,7 @@
                 <a:ea typeface="Verdana"/>
                 <a:cs typeface="Verdana"/>
               </a:rPr>
-              <a:t>Объяснить стоимость «висящего» слота; предложить договор с отложенным стартом и небольшой фиксацией; календарный hold; иначе — вернуть в pipeline без иллюзии сделки.</a:t>
+              <a:t>Стоимость висящего слота; договор с отложенным стартом + фиксация; календарный hold; иначе — вернуть в pipeline без статуса “выиграли”.</a:t>
             </a:r>
           </a:p>
         </p:txBody>
@@ -9446,8 +9456,8 @@
         </p:nvSpPr>
         <p:spPr>
           <a:xfrm>
-            <a:off x="502920" y="1097280"/>
-            <a:ext cx="8778240" cy="3063240"/>
+            <a:off x="502920" y="1051560"/>
+            <a:ext cx="8778240" cy="3246120"/>
           </a:xfrm>
           <a:prstGeom prst="roundRect">
             <a:avLst>
@@ -9476,7 +9486,7 @@
           </a:fontRef>
         </p:style>
         <p:txBody>
-          <a:bodyPr rtlCol="0" anchor="t" wrap="square" lIns="137160" rIns="137160" tIns="91440"/>
+          <a:bodyPr rtlCol="0" anchor="t" wrap="square" lIns="128016" rIns="128016" tIns="73152" bIns="73152"/>
           <a:lstStyle/>
           <a:p>
             <a:pPr algn="l"/>
@@ -9495,11 +9505,11 @@
           <a:p>
             <a:pPr algn="l">
               <a:spcBef>
-                <a:spcPts val="600"/>
+                <a:spcPts val="500"/>
               </a:spcBef>
             </a:pPr>
             <a:r>
-              <a:rPr sz="1300" b="0">
+              <a:rPr sz="1200" b="0">
                 <a:solidFill>
                   <a:srgbClr val="FFFFFF"/>
                 </a:solidFill>
@@ -9507,17 +9517,19 @@
                 <a:ea typeface="Verdana"/>
                 <a:cs typeface="Verdana"/>
               </a:rPr>
-              <a:t>Складской учёт «на коленке» в Excel тормозит отгрузки: ошибки, долгие инвентаризации. Кладовщики против перемен.</a:t>
+              <a:t>Компания: «СкладСервис 38» — ответственное хранение, 2 склада класса B.
+ЛПР на встрече: Роман Демидов, директор склада.
+Ситуация: отгрузки срываются из‑за ошибок ячеек в Excel. Кладовщики против “новой программы”. Роман понимает боль, но команда давит.</a:t>
             </a:r>
           </a:p>
           <a:p>
             <a:pPr algn="l">
               <a:spcBef>
-                <a:spcPts val="600"/>
+                <a:spcPts val="500"/>
               </a:spcBef>
             </a:pPr>
             <a:r>
-              <a:rPr sz="1300" b="0">
+              <a:rPr sz="1200" b="0">
                 <a:solidFill>
                   <a:srgbClr val="FFFFFF"/>
                 </a:solidFill>
@@ -9525,7 +9537,7 @@
                 <a:ea typeface="Verdana"/>
                 <a:cs typeface="Verdana"/>
               </a:rPr>
-              <a:t>Возражение: «Excel нас устраивает, привыкли».</a:t>
+              <a:t>Возражение Романа: «Excel нас устраивает, люди привыкли. Не будем ломать то, что работает».</a:t>
             </a:r>
           </a:p>
         </p:txBody>
@@ -9538,8 +9550,8 @@
         </p:nvSpPr>
         <p:spPr>
           <a:xfrm>
-            <a:off x="640080" y="4251960"/>
-            <a:ext cx="8503920" cy="411480"/>
+            <a:off x="640080" y="4370832"/>
+            <a:ext cx="8503920" cy="365760"/>
           </a:xfrm>
           <a:prstGeom prst="rect">
             <a:avLst/>
@@ -9554,7 +9566,7 @@
           <a:p>
             <a:pPr algn="l"/>
             <a:r>
-              <a:rPr sz="1200" b="1">
+              <a:rPr sz="1100" b="1">
                 <a:solidFill>
                   <a:srgbClr val="F0B42E"/>
                 </a:solidFill>
@@ -9562,7 +9574,7 @@
                 <a:ea typeface="Verdana"/>
                 <a:cs typeface="Verdana"/>
               </a:rPr>
-              <a:t>Задача: Вскройте боль без атаки на Excel и приведите к демо/пилоту.</a:t>
+              <a:t>Задача: Вскройте боль без атаки на Excel и выведите на демо/пилот.</a:t>
             </a:r>
           </a:p>
         </p:txBody>
@@ -9575,8 +9587,8 @@
         </p:nvSpPr>
         <p:spPr>
           <a:xfrm>
-            <a:off x="502920" y="4709160"/>
-            <a:ext cx="8778240" cy="1325880"/>
+            <a:off x="502920" y="4754880"/>
+            <a:ext cx="8778240" cy="1234440"/>
           </a:xfrm>
           <a:prstGeom prst="roundRect">
             <a:avLst>
@@ -9636,7 +9648,7 @@
                 <a:ea typeface="Verdana"/>
                 <a:cs typeface="Verdana"/>
               </a:rPr>
-              <a:t>Вопросы про стоимость ошибок и время на сверки; кейс «одного дня отгрузки»; предложить пилот на одном складе, не «ломая всё сразу».</a:t>
+              <a:t>Вопросы про стоимость ошибок и время сверок; кейс одного срыва отгрузки; пилот на одной зоне склада без “большого взрыва”.</a:t>
             </a:r>
           </a:p>
         </p:txBody>
@@ -10005,8 +10017,8 @@
         </p:nvSpPr>
         <p:spPr>
           <a:xfrm>
-            <a:off x="502920" y="1097280"/>
-            <a:ext cx="8778240" cy="3063240"/>
+            <a:off x="502920" y="1051560"/>
+            <a:ext cx="8778240" cy="3246120"/>
           </a:xfrm>
           <a:prstGeom prst="roundRect">
             <a:avLst>
@@ -10035,7 +10047,7 @@
           </a:fontRef>
         </p:style>
         <p:txBody>
-          <a:bodyPr rtlCol="0" anchor="t" wrap="square" lIns="137160" rIns="137160" tIns="91440"/>
+          <a:bodyPr rtlCol="0" anchor="t" wrap="square" lIns="128016" rIns="128016" tIns="73152" bIns="73152"/>
           <a:lstStyle/>
           <a:p>
             <a:pPr algn="l"/>
@@ -10054,11 +10066,11 @@
           <a:p>
             <a:pPr algn="l">
               <a:spcBef>
-                <a:spcPts val="600"/>
+                <a:spcPts val="500"/>
               </a:spcBef>
             </a:pPr>
             <a:r>
-              <a:rPr sz="1300" b="0">
+              <a:rPr sz="1200" b="0">
                 <a:solidFill>
                   <a:srgbClr val="FFFFFF"/>
                 </a:solidFill>
@@ -10066,17 +10078,19 @@
                 <a:ea typeface="Verdana"/>
                 <a:cs typeface="Verdana"/>
               </a:rPr>
-              <a:t>Компания с филиалами хочет единую картину по остаткам и продажам. Сейчас у каждого своя локальная логика.</a:t>
+              <a:t>Компания: «Сибирский Инструмент» — филиалы в Иркутске, Братске, Чите.
+ЛПР на встрече: Анна Круглова, главбух управляющей компании.
+Ситуация: собственник хочет единую картину остатков и продаж по филиалам. Сейчас у каждого своя локальная логика + общая 1С:Бухгалтерия.</a:t>
             </a:r>
           </a:p>
           <a:p>
             <a:pPr algn="l">
               <a:spcBef>
-                <a:spcPts val="600"/>
+                <a:spcPts val="500"/>
               </a:spcBef>
             </a:pPr>
             <a:r>
-              <a:rPr sz="1300" b="0">
+              <a:rPr sz="1200" b="0">
                 <a:solidFill>
                   <a:srgbClr val="FFFFFF"/>
                 </a:solidFill>
@@ -10084,7 +10098,7 @@
                 <a:ea typeface="Verdana"/>
                 <a:cs typeface="Verdana"/>
               </a:rPr>
-              <a:t>Возражение: «У нас уже стоит 1С:Бухгалтерия — этого хватит».</a:t>
+              <a:t>Возражение Анны: «У нас уже стоит 1С:Бухгалтерия — этого хватит. Зачем платить ещё за УТ?»</a:t>
             </a:r>
           </a:p>
         </p:txBody>
@@ -10097,8 +10111,8 @@
         </p:nvSpPr>
         <p:spPr>
           <a:xfrm>
-            <a:off x="640080" y="4251960"/>
-            <a:ext cx="8503920" cy="411480"/>
+            <a:off x="640080" y="4370832"/>
+            <a:ext cx="8503920" cy="365760"/>
           </a:xfrm>
           <a:prstGeom prst="rect">
             <a:avLst/>
@@ -10113,7 +10127,7 @@
           <a:p>
             <a:pPr algn="l"/>
             <a:r>
-              <a:rPr sz="1200" b="1">
+              <a:rPr sz="1100" b="1">
                 <a:solidFill>
                   <a:srgbClr val="F0B42E"/>
                 </a:solidFill>
@@ -10121,7 +10135,7 @@
                 <a:ea typeface="Verdana"/>
                 <a:cs typeface="Verdana"/>
               </a:rPr>
-              <a:t>Задача: Покажите границу БП и необходимость контура УТ/ERP — до продажи.</a:t>
+              <a:t>Задача: Покажите границу БП и необходимость операционного контура — доведите до интереса/КП.</a:t>
             </a:r>
           </a:p>
         </p:txBody>
@@ -10134,8 +10148,8 @@
         </p:nvSpPr>
         <p:spPr>
           <a:xfrm>
-            <a:off x="502920" y="4709160"/>
-            <a:ext cx="8778240" cy="1325880"/>
+            <a:off x="502920" y="4754880"/>
+            <a:ext cx="8778240" cy="1234440"/>
           </a:xfrm>
           <a:prstGeom prst="roundRect">
             <a:avLst>
@@ -10195,7 +10209,7 @@
                 <a:ea typeface="Verdana"/>
                 <a:cs typeface="Verdana"/>
               </a:rPr>
-              <a:t>Отделить регламентированный учёт от операционного; показать, чего БП не закрывает (склады, заказы, филиалы); предложить надстройку/обмен, а не «выбросить БП».</a:t>
+              <a:t>Отделить регл. учёт от операционного; что БП не закрывает (склады, заказы, филиалы); предложить надстройку/обмен, не “выбросить БП”.</a:t>
             </a:r>
           </a:p>
         </p:txBody>
@@ -10564,8 +10578,8 @@
         </p:nvSpPr>
         <p:spPr>
           <a:xfrm>
-            <a:off x="502920" y="1097280"/>
-            <a:ext cx="8778240" cy="3063240"/>
+            <a:off x="502920" y="1051560"/>
+            <a:ext cx="8778240" cy="3246120"/>
           </a:xfrm>
           <a:prstGeom prst="roundRect">
             <a:avLst>
@@ -10594,7 +10608,7 @@
           </a:fontRef>
         </p:style>
         <p:txBody>
-          <a:bodyPr rtlCol="0" anchor="t" wrap="square" lIns="137160" rIns="137160" tIns="91440"/>
+          <a:bodyPr rtlCol="0" anchor="t" wrap="square" lIns="128016" rIns="128016" tIns="73152" bIns="73152"/>
           <a:lstStyle/>
           <a:p>
             <a:pPr algn="l"/>
@@ -10613,11 +10627,11 @@
           <a:p>
             <a:pPr algn="l">
               <a:spcBef>
-                <a:spcPts val="600"/>
+                <a:spcPts val="500"/>
               </a:spcBef>
             </a:pPr>
             <a:r>
-              <a:rPr sz="1300" b="0">
+              <a:rPr sz="1200" b="0">
                 <a:solidFill>
                   <a:srgbClr val="FFFFFF"/>
                 </a:solidFill>
@@ -10625,17 +10639,19 @@
                 <a:ea typeface="Verdana"/>
                 <a:cs typeface="Verdana"/>
               </a:rPr>
-              <a:t>Компания хочет CRM + продажи, связку с 1С. Вчера был другой вендор.</a:t>
+              <a:t>Компания: «ГородУслуг» — сервисная компания (клининг + ремонт), 25 менеджеров.
+ЛПР на встрече: Кирилл Новиков, коммерческий директор.
+Ситуация: нужна CRM + дисциплина сделок и связь с 1С. Вчера у них был другой вендор с яркой презентацией.</a:t>
             </a:r>
           </a:p>
           <a:p>
             <a:pPr algn="l">
               <a:spcBef>
-                <a:spcPts val="600"/>
+                <a:spcPts val="500"/>
               </a:spcBef>
             </a:pPr>
             <a:r>
-              <a:rPr sz="1300" b="0">
+              <a:rPr sz="1200" b="0">
                 <a:solidFill>
                   <a:srgbClr val="FFFFFF"/>
                 </a:solidFill>
@@ -10643,7 +10659,7 @@
                 <a:ea typeface="Verdana"/>
                 <a:cs typeface="Verdana"/>
               </a:rPr>
-              <a:t>Возражение: «Нам нарисовали внедрение Битрикс за 2 недели».</a:t>
+              <a:t>Возражение Кирилла: «Нам вчера нарисовали внедрение Битрикс за 2 недели. Вы говорите про месяц–полтора. Зачем нам медленнее?»</a:t>
             </a:r>
           </a:p>
         </p:txBody>
@@ -10656,8 +10672,8 @@
         </p:nvSpPr>
         <p:spPr>
           <a:xfrm>
-            <a:off x="640080" y="4251960"/>
-            <a:ext cx="8503920" cy="411480"/>
+            <a:off x="640080" y="4370832"/>
+            <a:ext cx="8503920" cy="365760"/>
           </a:xfrm>
           <a:prstGeom prst="rect">
             <a:avLst/>
@@ -10672,7 +10688,7 @@
           <a:p>
             <a:pPr algn="l"/>
             <a:r>
-              <a:rPr sz="1200" b="1">
+              <a:rPr sz="1100" b="1">
                 <a:solidFill>
                   <a:srgbClr val="F0B42E"/>
                 </a:solidFill>
@@ -10680,7 +10696,7 @@
                 <a:ea typeface="Verdana"/>
                 <a:cs typeface="Verdana"/>
               </a:rPr>
-              <a:t>Задача: Отработайте «быстрый конкурент» и верните к осознанному выбору.</a:t>
+              <a:t>Задача: Отработайте “быстрого конкурента” и верните к осознанному выбору с путём к покупке.</a:t>
             </a:r>
           </a:p>
         </p:txBody>
@@ -10693,8 +10709,8 @@
         </p:nvSpPr>
         <p:spPr>
           <a:xfrm>
-            <a:off x="502920" y="4709160"/>
-            <a:ext cx="8778240" cy="1325880"/>
+            <a:off x="502920" y="4754880"/>
+            <a:ext cx="8778240" cy="1234440"/>
           </a:xfrm>
           <a:prstGeom prst="roundRect">
             <a:avLst>
@@ -10754,7 +10770,7 @@
                 <a:ea typeface="Verdana"/>
                 <a:cs typeface="Verdana"/>
               </a:rPr>
-              <a:t>Спросить про интеграции с 1С, роли, историю, телефонию, права; показать типовые риски «за 2 недели»; предложить сравнительный сценарий под их процесс, не антирекламу.</a:t>
+              <a:t>Спросить про интеграции с 1С, историю, роли, телефонию; риски “за 2 недели”; сравнительный сценарий под их процесс без антирекламы.</a:t>
             </a:r>
           </a:p>
         </p:txBody>
@@ -11123,8 +11139,8 @@
         </p:nvSpPr>
         <p:spPr>
           <a:xfrm>
-            <a:off x="502920" y="1097280"/>
-            <a:ext cx="8778240" cy="3063240"/>
+            <a:off x="502920" y="1051560"/>
+            <a:ext cx="8778240" cy="3246120"/>
           </a:xfrm>
           <a:prstGeom prst="roundRect">
             <a:avLst>
@@ -11153,7 +11169,7 @@
           </a:fontRef>
         </p:style>
         <p:txBody>
-          <a:bodyPr rtlCol="0" anchor="t" wrap="square" lIns="137160" rIns="137160" tIns="91440"/>
+          <a:bodyPr rtlCol="0" anchor="t" wrap="square" lIns="128016" rIns="128016" tIns="73152" bIns="73152"/>
           <a:lstStyle/>
           <a:p>
             <a:pPr algn="l"/>
@@ -11172,11 +11188,11 @@
           <a:p>
             <a:pPr algn="l">
               <a:spcBef>
-                <a:spcPts val="600"/>
+                <a:spcPts val="500"/>
               </a:spcBef>
             </a:pPr>
             <a:r>
-              <a:rPr sz="1300" b="0">
+              <a:rPr sz="1200" b="0">
                 <a:solidFill>
                   <a:srgbClr val="FFFFFF"/>
                 </a:solidFill>
@@ -11184,17 +11200,19 @@
                 <a:ea typeface="Verdana"/>
                 <a:cs typeface="Verdana"/>
               </a:rPr>
-              <a:t>Клиент готов купить лицензии 1С. Деньги на ПО есть, на проект — спорно.</a:t>
+              <a:t>Компания: «ПолимерПак» — производство упаковки, 200 сотрудников.
+ЛПР на встрече: Светлана Юрьева, IT-директор.
+Ситуация: бюджет на лицензии 1С согласовали. На проектные работы и обучение Светлана хочет сэкономить: “сами настроим по роликам”.</a:t>
             </a:r>
           </a:p>
           <a:p>
             <a:pPr algn="l">
               <a:spcBef>
-                <a:spcPts val="600"/>
+                <a:spcPts val="500"/>
               </a:spcBef>
             </a:pPr>
             <a:r>
-              <a:rPr sz="1300" b="0">
+              <a:rPr sz="1200" b="0">
                 <a:solidFill>
                   <a:srgbClr val="FFFFFF"/>
                 </a:solidFill>
@@ -11202,7 +11220,7 @@
                 <a:ea typeface="Verdana"/>
                 <a:cs typeface="Verdana"/>
               </a:rPr>
-              <a:t>Возражение: «Только лицензии, без вашего проекта и обучения».</a:t>
+              <a:t>Возражение Светланы: «Только лицензии. Без вашего проекта и обучения — у нас есть программист».</a:t>
             </a:r>
           </a:p>
         </p:txBody>
@@ -11215,8 +11233,8 @@
         </p:nvSpPr>
         <p:spPr>
           <a:xfrm>
-            <a:off x="640080" y="4251960"/>
-            <a:ext cx="8503920" cy="411480"/>
+            <a:off x="640080" y="4370832"/>
+            <a:ext cx="8503920" cy="365760"/>
           </a:xfrm>
           <a:prstGeom prst="rect">
             <a:avLst/>
@@ -11231,7 +11249,7 @@
           <a:p>
             <a:pPr algn="l"/>
             <a:r>
-              <a:rPr sz="1200" b="1">
+              <a:rPr sz="1100" b="1">
                 <a:solidFill>
                   <a:srgbClr val="F0B42E"/>
                 </a:solidFill>
@@ -11239,7 +11257,7 @@
                 <a:ea typeface="Verdana"/>
                 <a:cs typeface="Verdana"/>
               </a:rPr>
-              <a:t>Задача: Продайте нужный минимум работ или безопасно отпустите в «только лицензии».</a:t>
+              <a:t>Задача: Продайте необходимый минимум работ или безопасно оформите only-license.</a:t>
             </a:r>
           </a:p>
         </p:txBody>
@@ -11252,8 +11270,8 @@
         </p:nvSpPr>
         <p:spPr>
           <a:xfrm>
-            <a:off x="502920" y="4709160"/>
-            <a:ext cx="8778240" cy="1325880"/>
+            <a:off x="502920" y="4754880"/>
+            <a:ext cx="8778240" cy="1234440"/>
           </a:xfrm>
           <a:prstGeom prst="roundRect">
             <a:avLst>
@@ -11313,7 +11331,7 @@
                 <a:ea typeface="Verdana"/>
                 <a:cs typeface="Verdana"/>
               </a:rPr>
-              <a:t>Предупредить о риске «лицензии в стол»; предложить пакет запуска (настройка + обучение 2 дней); письменно зафиксировать границы ответственности при продаже only-license.</a:t>
+              <a:t>Риск “лицензии в стол”; пакет запуска (настройка+обучение); письменно зафиксировать границы ответственности при продаже только лицензий.</a:t>
             </a:r>
           </a:p>
         </p:txBody>
@@ -11682,8 +11700,8 @@
         </p:nvSpPr>
         <p:spPr>
           <a:xfrm>
-            <a:off x="502920" y="1097280"/>
-            <a:ext cx="8778240" cy="3063240"/>
+            <a:off x="502920" y="1051560"/>
+            <a:ext cx="8778240" cy="3246120"/>
           </a:xfrm>
           <a:prstGeom prst="roundRect">
             <a:avLst>
@@ -11712,7 +11730,7 @@
           </a:fontRef>
         </p:style>
         <p:txBody>
-          <a:bodyPr rtlCol="0" anchor="t" wrap="square" lIns="137160" rIns="137160" tIns="91440"/>
+          <a:bodyPr rtlCol="0" anchor="t" wrap="square" lIns="128016" rIns="128016" tIns="73152" bIns="73152"/>
           <a:lstStyle/>
           <a:p>
             <a:pPr algn="l"/>
@@ -11731,11 +11749,11 @@
           <a:p>
             <a:pPr algn="l">
               <a:spcBef>
-                <a:spcPts val="600"/>
+                <a:spcPts val="500"/>
               </a:spcBef>
             </a:pPr>
             <a:r>
-              <a:rPr sz="1300" b="0">
+              <a:rPr sz="1200" b="0">
                 <a:solidFill>
                   <a:srgbClr val="FFFFFF"/>
                 </a:solidFill>
@@ -11743,17 +11761,19 @@
                 <a:ea typeface="Verdana"/>
                 <a:cs typeface="Verdana"/>
               </a:rPr>
-              <a:t>Идёт замена текущего интегратора 1С: качество поддержки упало. Формально вас зовут в конкурс.</a:t>
+              <a:t>Компания: «Восточный Альянс» — оптовая фармдистрибуция.
+ЛПР на встрече: Игорь Матвеев, заместитель гендиректора по операциям.
+Ситуация: качество поддержки текущего интегратора упало, вас зовут “поиграть в конкурс”. Игорь шепотом признаётся в политике.</a:t>
             </a:r>
           </a:p>
           <a:p>
             <a:pPr algn="l">
               <a:spcBef>
-                <a:spcPts val="600"/>
+                <a:spcPts val="500"/>
               </a:spcBef>
             </a:pPr>
             <a:r>
-              <a:rPr sz="1300" b="0">
+              <a:rPr sz="1200" b="0">
                 <a:solidFill>
                   <a:srgbClr val="FFFFFF"/>
                 </a:solidFill>
@@ -11761,7 +11781,7 @@
                 <a:ea typeface="Verdana"/>
                 <a:cs typeface="Verdana"/>
               </a:rPr>
-              <a:t>Возражение: «Текущий подрядчик — родственник учредителя; формально выбираем вас, фактически — его».</a:t>
+              <a:t>Возражение Игоря: «Текущий подрядчик — родственник учредителя. Формально выбираем вас, фактически победит он. Но КП пришлите».</a:t>
             </a:r>
           </a:p>
         </p:txBody>
@@ -11774,8 +11794,8 @@
         </p:nvSpPr>
         <p:spPr>
           <a:xfrm>
-            <a:off x="640080" y="4251960"/>
-            <a:ext cx="8503920" cy="411480"/>
+            <a:off x="640080" y="4370832"/>
+            <a:ext cx="8503920" cy="365760"/>
           </a:xfrm>
           <a:prstGeom prst="rect">
             <a:avLst/>
@@ -11790,7 +11810,7 @@
           <a:p>
             <a:pPr algn="l"/>
             <a:r>
-              <a:rPr sz="1200" b="1">
+              <a:rPr sz="1100" b="1">
                 <a:solidFill>
                   <a:srgbClr val="F0B42E"/>
                 </a:solidFill>
@@ -11798,7 +11818,7 @@
                 <a:ea typeface="Verdana"/>
                 <a:cs typeface="Verdana"/>
               </a:rPr>
-              <a:t>Задача: Определите реальность сделки и найдите путь к покупке или выходу.</a:t>
+              <a:t>Задача: Определите реальность сделки и найдите путь к покупке — или корректный выход.</a:t>
             </a:r>
           </a:p>
         </p:txBody>
@@ -11811,8 +11831,8 @@
         </p:nvSpPr>
         <p:spPr>
           <a:xfrm>
-            <a:off x="502920" y="4709160"/>
-            <a:ext cx="8778240" cy="1325880"/>
+            <a:off x="502920" y="4754880"/>
+            <a:ext cx="8778240" cy="1234440"/>
           </a:xfrm>
           <a:prstGeom prst="roundRect">
             <a:avLst>
@@ -11872,7 +11892,7 @@
                 <a:ea typeface="Verdana"/>
                 <a:cs typeface="Verdana"/>
               </a:rPr>
-              <a:t>Квалифицировать: есть ли спонсор сильнее родственника; предложить пилот/SLA с измеримым эффектом; не демпинговать «для галочки»; при политике — вежливый выход с дверью на будущее.</a:t>
+              <a:t>Квалифицировать спонсора сильнее родственника; пилот/SLA с эффектом; не демпинговать “для галочки”; при политике — выход с дверью на будущее.</a:t>
             </a:r>
           </a:p>
         </p:txBody>
@@ -14785,8 +14805,8 @@
         </p:nvSpPr>
         <p:spPr>
           <a:xfrm>
-            <a:off x="502920" y="1097280"/>
-            <a:ext cx="8778240" cy="3063240"/>
+            <a:off x="502920" y="1051560"/>
+            <a:ext cx="8778240" cy="3246120"/>
           </a:xfrm>
           <a:prstGeom prst="roundRect">
             <a:avLst>
@@ -14815,7 +14835,7 @@
           </a:fontRef>
         </p:style>
         <p:txBody>
-          <a:bodyPr rtlCol="0" anchor="t" wrap="square" lIns="137160" rIns="137160" tIns="91440"/>
+          <a:bodyPr rtlCol="0" anchor="t" wrap="square" lIns="128016" rIns="128016" tIns="73152" bIns="73152"/>
           <a:lstStyle/>
           <a:p>
             <a:pPr algn="l"/>
@@ -14834,11 +14854,11 @@
           <a:p>
             <a:pPr algn="l">
               <a:spcBef>
-                <a:spcPts val="600"/>
+                <a:spcPts val="500"/>
               </a:spcBef>
             </a:pPr>
             <a:r>
-              <a:rPr sz="1300" b="0">
+              <a:rPr sz="1200" b="0">
                 <a:solidFill>
                   <a:srgbClr val="FFFFFF"/>
                 </a:solidFill>
@@ -14846,17 +14866,19 @@
                 <a:ea typeface="Verdana"/>
                 <a:cs typeface="Verdana"/>
               </a:rPr>
-              <a:t>Производство хочет MES-контур на базе 1С (цех, сменно-суточные задания). Технически тема живая.</a:t>
+              <a:t>Компания: «МеталлСтройСнаб» — производство металлоконструкций.
+ЛПР на встрече: Денис Кравцов, технический директор.
+Ситуация: хотят MES-контур на базе 1С (сменно-суточные, цеховые задания). Денис технически “за”, но коллектив и директор помнят прошлый провал.</a:t>
             </a:r>
           </a:p>
           <a:p>
             <a:pPr algn="l">
               <a:spcBef>
-                <a:spcPts val="600"/>
+                <a:spcPts val="500"/>
               </a:spcBef>
             </a:pPr>
             <a:r>
-              <a:rPr sz="1300" b="0">
+              <a:rPr sz="1200" b="0">
                 <a:solidFill>
                   <a:srgbClr val="FFFFFF"/>
                 </a:solidFill>
@@ -14864,7 +14886,7 @@
                 <a:ea typeface="Verdana"/>
                 <a:cs typeface="Verdana"/>
               </a:rPr>
-              <a:t>Возражение: «Два года назад 1С внедряли — провал, больше не хотим».</a:t>
+              <a:t>Возражение Дениса: «Два года назад 1С внедряли — полный провал. Люди до сих пор плюются. Больше 1С не хотим, даже если логично».</a:t>
             </a:r>
           </a:p>
         </p:txBody>
@@ -14877,8 +14899,8 @@
         </p:nvSpPr>
         <p:spPr>
           <a:xfrm>
-            <a:off x="640080" y="4251960"/>
-            <a:ext cx="8503920" cy="411480"/>
+            <a:off x="640080" y="4370832"/>
+            <a:ext cx="8503920" cy="365760"/>
           </a:xfrm>
           <a:prstGeom prst="rect">
             <a:avLst/>
@@ -14893,7 +14915,7 @@
           <a:p>
             <a:pPr algn="l"/>
             <a:r>
-              <a:rPr sz="1200" b="1">
+              <a:rPr sz="1100" b="1">
                 <a:solidFill>
                   <a:srgbClr val="F0B42E"/>
                 </a:solidFill>
@@ -14914,8 +14936,8 @@
         </p:nvSpPr>
         <p:spPr>
           <a:xfrm>
-            <a:off x="502920" y="4709160"/>
-            <a:ext cx="8778240" cy="1325880"/>
+            <a:off x="502920" y="4754880"/>
+            <a:ext cx="8778240" cy="1234440"/>
           </a:xfrm>
           <a:prstGeom prst="roundRect">
             <a:avLst>
@@ -14975,7 +14997,7 @@
                 <a:ea typeface="Verdana"/>
                 <a:cs typeface="Verdana"/>
               </a:rPr>
-              <a:t>Разобрать, что именно провалилось (цели, подрядчик, данные, люди); предложить диагностику «почему снова будет иначе»; маленький пилот на одном участке с жёсткими критериями успеха.</a:t>
+              <a:t>Разобрать, что провалилось (цели, подрядчик, данные, люди); диагностика “почему иначе”; пилот на одном участке с жёсткими критериями успеха.</a:t>
             </a:r>
           </a:p>
         </p:txBody>
@@ -15344,8 +15366,8 @@
         </p:nvSpPr>
         <p:spPr>
           <a:xfrm>
-            <a:off x="502920" y="1097280"/>
-            <a:ext cx="8778240" cy="3063240"/>
+            <a:off x="502920" y="1051560"/>
+            <a:ext cx="8778240" cy="3246120"/>
           </a:xfrm>
           <a:prstGeom prst="roundRect">
             <a:avLst>
@@ -15374,7 +15396,7 @@
           </a:fontRef>
         </p:style>
         <p:txBody>
-          <a:bodyPr rtlCol="0" anchor="t" wrap="square" lIns="137160" rIns="137160" tIns="91440"/>
+          <a:bodyPr rtlCol="0" anchor="t" wrap="square" lIns="128016" rIns="128016" tIns="73152" bIns="73152"/>
           <a:lstStyle/>
           <a:p>
             <a:pPr algn="l"/>
@@ -15393,11 +15415,11 @@
           <a:p>
             <a:pPr algn="l">
               <a:spcBef>
-                <a:spcPts val="600"/>
+                <a:spcPts val="500"/>
               </a:spcBef>
             </a:pPr>
             <a:r>
-              <a:rPr sz="1300" b="0">
+              <a:rPr sz="1200" b="0">
                 <a:solidFill>
                   <a:srgbClr val="FFFFFF"/>
                 </a:solidFill>
@@ -15405,17 +15427,19 @@
                 <a:ea typeface="Verdana"/>
                 <a:cs typeface="Verdana"/>
               </a:rPr>
-              <a:t>Клиент рассматривает переход в облачную 1С (1cfresh / частное облако). IT насторожен.</a:t>
+              <a:t>Компания: агентство «ПромоСибирь» — 35 сотрудников, сейчас 1С на сервере в кабинете админа.
+ЛПР на встрече: Максим Лебедев, IT-администратор (решение подтверждает директор).
+Ситуация: хотят уйти в облачную 1С, чтобы не обслуживать железо. Максим тревожный: “а если в пятницу вечером…”.</a:t>
             </a:r>
           </a:p>
           <a:p>
             <a:pPr algn="l">
               <a:spcBef>
-                <a:spcPts val="600"/>
+                <a:spcPts val="500"/>
               </a:spcBef>
             </a:pPr>
             <a:r>
-              <a:rPr sz="1300" b="0">
+              <a:rPr sz="1200" b="0">
                 <a:solidFill>
                   <a:srgbClr val="FFFFFF"/>
                 </a:solidFill>
@@ -15423,7 +15447,7 @@
                 <a:ea typeface="Verdana"/>
                 <a:cs typeface="Verdana"/>
               </a:rPr>
-              <a:t>Возражение: «А вдруг всё упадёт в пятницу вечером?»</a:t>
+              <a:t>Возражение Максима: «А вдруг всё упадёт в пятницу вечером — и мы без базы до понедельника?»</a:t>
             </a:r>
           </a:p>
         </p:txBody>
@@ -15436,8 +15460,8 @@
         </p:nvSpPr>
         <p:spPr>
           <a:xfrm>
-            <a:off x="640080" y="4251960"/>
-            <a:ext cx="8503920" cy="411480"/>
+            <a:off x="640080" y="4370832"/>
+            <a:ext cx="8503920" cy="365760"/>
           </a:xfrm>
           <a:prstGeom prst="rect">
             <a:avLst/>
@@ -15452,7 +15476,7 @@
           <a:p>
             <a:pPr algn="l"/>
             <a:r>
-              <a:rPr sz="1200" b="1">
+              <a:rPr sz="1100" b="1">
                 <a:solidFill>
                   <a:srgbClr val="F0B42E"/>
                 </a:solidFill>
@@ -15460,7 +15484,7 @@
                 <a:ea typeface="Verdana"/>
                 <a:cs typeface="Verdana"/>
               </a:rPr>
-              <a:t>Задача: Снимите тревогу и доведите до пилота/договора.</a:t>
+              <a:t>Задача: Снимите тревогу по доступности и доведите до пилота/договора.</a:t>
             </a:r>
           </a:p>
         </p:txBody>
@@ -15473,8 +15497,8 @@
         </p:nvSpPr>
         <p:spPr>
           <a:xfrm>
-            <a:off x="502920" y="4709160"/>
-            <a:ext cx="8778240" cy="1325880"/>
+            <a:off x="502920" y="4754880"/>
+            <a:ext cx="8778240" cy="1234440"/>
           </a:xfrm>
           <a:prstGeom prst="roundRect">
             <a:avLst>
@@ -15534,7 +15558,7 @@
                 <a:ea typeface="Verdana"/>
                 <a:cs typeface="Verdana"/>
               </a:rPr>
-              <a:t>SLA, резервное копирование, регламент инцидентов; кейсы доступности; план отката; предложить пилот на некритичной базе.</a:t>
+              <a:t>SLA, бэкапы, регламент инцидентов; кейсы доступности; план отката; пилот на некритичной базе.</a:t>
             </a:r>
           </a:p>
         </p:txBody>
@@ -15903,8 +15927,8 @@
         </p:nvSpPr>
         <p:spPr>
           <a:xfrm>
-            <a:off x="502920" y="1097280"/>
-            <a:ext cx="8778240" cy="3063240"/>
+            <a:off x="502920" y="1051560"/>
+            <a:ext cx="8778240" cy="3246120"/>
           </a:xfrm>
           <a:prstGeom prst="roundRect">
             <a:avLst>
@@ -15933,7 +15957,7 @@
           </a:fontRef>
         </p:style>
         <p:txBody>
-          <a:bodyPr rtlCol="0" anchor="t" wrap="square" lIns="137160" rIns="137160" tIns="91440"/>
+          <a:bodyPr rtlCol="0" anchor="t" wrap="square" lIns="128016" rIns="128016" tIns="73152" bIns="73152"/>
           <a:lstStyle/>
           <a:p>
             <a:pPr algn="l"/>
@@ -15952,11 +15976,11 @@
           <a:p>
             <a:pPr algn="l">
               <a:spcBef>
-                <a:spcPts val="600"/>
+                <a:spcPts val="500"/>
               </a:spcBef>
             </a:pPr>
             <a:r>
-              <a:rPr sz="1300" b="0">
+              <a:rPr sz="1200" b="0">
                 <a:solidFill>
                   <a:srgbClr val="FFFFFF"/>
                 </a:solidFill>
@@ -15964,17 +15988,19 @@
                 <a:ea typeface="Verdana"/>
                 <a:cs typeface="Verdana"/>
               </a:rPr>
-              <a:t>Компания хочет КЭДО для кадров (заявления, приказы, подпись), интеграция с 1С:ЗУП.</a:t>
+              <a:t>Компания: «РегионКадры» — аутсорсинг расчёта зарплаты, 90 сотрудников.
+ЛПР на встрече: Ольга Витте, директор по персоналу; рядом — специалист ИБ заказчика.
+Ситуация: хотят КЭДО (заявления, приказы) с интеграцией в 1С:ЗУП. Бизнес “за”, ИБ тормозит.</a:t>
             </a:r>
           </a:p>
           <a:p>
             <a:pPr algn="l">
               <a:spcBef>
-                <a:spcPts val="600"/>
+                <a:spcPts val="500"/>
               </a:spcBef>
             </a:pPr>
             <a:r>
-              <a:rPr sz="1300" b="0">
+              <a:rPr sz="1200" b="0">
                 <a:solidFill>
                   <a:srgbClr val="FFFFFF"/>
                 </a:solidFill>
@@ -15982,7 +16008,7 @@
                 <a:ea typeface="Verdana"/>
                 <a:cs typeface="Verdana"/>
               </a:rPr>
-              <a:t>Возражение: «Данные сотрудников в облако не отдадим».</a:t>
+              <a:t>Возражение Ольги (озвучивает позицию ИБ): «Персональные данные сотрудников в облако не отдадим — даже если удобно».</a:t>
             </a:r>
           </a:p>
         </p:txBody>
@@ -15995,8 +16021,8 @@
         </p:nvSpPr>
         <p:spPr>
           <a:xfrm>
-            <a:off x="640080" y="4251960"/>
-            <a:ext cx="8503920" cy="411480"/>
+            <a:off x="640080" y="4370832"/>
+            <a:ext cx="8503920" cy="365760"/>
           </a:xfrm>
           <a:prstGeom prst="rect">
             <a:avLst/>
@@ -16011,7 +16037,7 @@
           <a:p>
             <a:pPr algn="l"/>
             <a:r>
-              <a:rPr sz="1200" b="1">
+              <a:rPr sz="1100" b="1">
                 <a:solidFill>
                   <a:srgbClr val="F0B42E"/>
                 </a:solidFill>
@@ -16019,7 +16045,7 @@
                 <a:ea typeface="Verdana"/>
                 <a:cs typeface="Verdana"/>
               </a:rPr>
-              <a:t>Задача: Отработайте ИБ-возражение и предложите приемлемую схему покупки.</a:t>
+              <a:t>Задача: Отработайте ИБ-возражение по ПДн и предложите схему, ведущую к покупке.</a:t>
             </a:r>
           </a:p>
         </p:txBody>
@@ -16032,8 +16058,8 @@
         </p:nvSpPr>
         <p:spPr>
           <a:xfrm>
-            <a:off x="502920" y="4709160"/>
-            <a:ext cx="8778240" cy="1325880"/>
+            <a:off x="502920" y="4754880"/>
+            <a:ext cx="8778240" cy="1234440"/>
           </a:xfrm>
           <a:prstGeom prst="roundRect">
             <a:avLst>
@@ -16093,7 +16119,7 @@
                 <a:ea typeface="Verdana"/>
                 <a:cs typeface="Verdana"/>
               </a:rPr>
-              <a:t>Варианты on-prem / контур заказчика; правовые основания обработки; разграничение доступа; пилот на одном юрлице; подключить ИБ рано.</a:t>
+              <a:t>On-prem / контур заказчика; правовые основания; разграничение доступа; пилот на одном юрлице; подключить ИБ в требования рано.</a:t>
             </a:r>
           </a:p>
         </p:txBody>
@@ -16462,8 +16488,8 @@
         </p:nvSpPr>
         <p:spPr>
           <a:xfrm>
-            <a:off x="502920" y="1097280"/>
-            <a:ext cx="8778240" cy="3063240"/>
+            <a:off x="502920" y="1051560"/>
+            <a:ext cx="8778240" cy="3246120"/>
           </a:xfrm>
           <a:prstGeom prst="roundRect">
             <a:avLst>
@@ -16492,7 +16518,7 @@
           </a:fontRef>
         </p:style>
         <p:txBody>
-          <a:bodyPr rtlCol="0" anchor="t" wrap="square" lIns="137160" rIns="137160" tIns="91440"/>
+          <a:bodyPr rtlCol="0" anchor="t" wrap="square" lIns="128016" rIns="128016" tIns="73152" bIns="73152"/>
           <a:lstStyle/>
           <a:p>
             <a:pPr algn="l"/>
@@ -16511,11 +16537,11 @@
           <a:p>
             <a:pPr algn="l">
               <a:spcBef>
-                <a:spcPts val="600"/>
+                <a:spcPts val="500"/>
               </a:spcBef>
             </a:pPr>
             <a:r>
-              <a:rPr sz="1300" b="0">
+              <a:rPr sz="1100" b="0">
                 <a:solidFill>
                   <a:srgbClr val="FFFFFF"/>
                 </a:solidFill>
@@ -16523,17 +16549,19 @@
                 <a:ea typeface="Verdana"/>
                 <a:cs typeface="Verdana"/>
               </a:rPr>
-              <a:t>Банк/финконтур + 1С: нужны доработки под внутренние политики. КП уже отправлено.</a:t>
+              <a:t>Компания: «ФинТраст Консалт» — финансовый консультант, работает с банками и крупными заёмщиками (не банк, но режим “почти банк”).
+ЛПР на встрече: Никита Орлов, директор по информационной безопасности; заказчик проекта — финдиректор Алла Григорьева.
+Ситуация: Алла хочет управленческий контур на 1С и уже почти согласовала бюджет. Никита ставит входной билет: до любого договора вы за свой счёт проводите внешний пентест вашего облака/удалённого доступа и даёте отчёт “без замечаний”.</a:t>
             </a:r>
           </a:p>
           <a:p>
             <a:pPr algn="l">
               <a:spcBef>
-                <a:spcPts val="600"/>
+                <a:spcPts val="500"/>
               </a:spcBef>
             </a:pPr>
             <a:r>
-              <a:rPr sz="1300" b="0">
+              <a:rPr sz="1100" b="0">
                 <a:solidFill>
                   <a:srgbClr val="FFFFFF"/>
                 </a:solidFill>
@@ -16541,7 +16569,7 @@
                 <a:ea typeface="Verdana"/>
                 <a:cs typeface="Verdana"/>
               </a:rPr>
-              <a:t>Возражение: «ИБ не пропустит без доработок, которых у вас в КП нет».</a:t>
+              <a:t>Возражение Никиты: «Без пентеста за ваш счёт и закрытия всех findings ИБ даже демо на наших данных не согласует. Это не обсуждается».</a:t>
             </a:r>
           </a:p>
         </p:txBody>
@@ -16554,8 +16582,8 @@
         </p:nvSpPr>
         <p:spPr>
           <a:xfrm>
-            <a:off x="640080" y="4251960"/>
-            <a:ext cx="8503920" cy="411480"/>
+            <a:off x="640080" y="4370832"/>
+            <a:ext cx="8503920" cy="365760"/>
           </a:xfrm>
           <a:prstGeom prst="rect">
             <a:avLst/>
@@ -16570,7 +16598,7 @@
           <a:p>
             <a:pPr algn="l"/>
             <a:r>
-              <a:rPr sz="1200" b="1">
+              <a:rPr sz="1100" b="1">
                 <a:solidFill>
                   <a:srgbClr val="F0B42E"/>
                 </a:solidFill>
@@ -16578,7 +16606,7 @@
                 <a:ea typeface="Verdana"/>
                 <a:cs typeface="Verdana"/>
               </a:rPr>
-              <a:t>Задача: Верните сделку в конструктив: что добавить и как продать доработки.</a:t>
+              <a:t>Задача: Отработайте требование “пентест за наш счёт до сделки” и найдите путь к демо/договору.</a:t>
             </a:r>
           </a:p>
         </p:txBody>
@@ -16591,8 +16619,8 @@
         </p:nvSpPr>
         <p:spPr>
           <a:xfrm>
-            <a:off x="502920" y="4709160"/>
-            <a:ext cx="8778240" cy="1325880"/>
+            <a:off x="502920" y="4754880"/>
+            <a:ext cx="8778240" cy="1234440"/>
           </a:xfrm>
           <a:prstGeom prst="roundRect">
             <a:avLst>
@@ -16652,7 +16680,7 @@
                 <a:ea typeface="Verdana"/>
                 <a:cs typeface="Verdana"/>
               </a:rPr>
-              <a:t>Запросить чек-лист ИБ; оценить gap-анализ отдельной строкой; не обещать «уже всё есть»; этап «требования ИБ» до финальной сметы.</a:t>
+              <a:t>Отделить демо на обезличенных данных от прод-доступа; дать имеющиеся сертификаты/отчёты/архитектуру; оценить пентест как отдельную оплачиваемую услугу или этап после NDA+пилота; не обещать “ноль findings” заранее.</a:t>
             </a:r>
           </a:p>
         </p:txBody>
@@ -17021,8 +17049,8 @@
         </p:nvSpPr>
         <p:spPr>
           <a:xfrm>
-            <a:off x="502920" y="1097280"/>
-            <a:ext cx="8778240" cy="3063240"/>
+            <a:off x="502920" y="1051560"/>
+            <a:ext cx="8778240" cy="3246120"/>
           </a:xfrm>
           <a:prstGeom prst="roundRect">
             <a:avLst>
@@ -17051,7 +17079,7 @@
           </a:fontRef>
         </p:style>
         <p:txBody>
-          <a:bodyPr rtlCol="0" anchor="t" wrap="square" lIns="137160" rIns="137160" tIns="91440"/>
+          <a:bodyPr rtlCol="0" anchor="t" wrap="square" lIns="128016" rIns="128016" tIns="73152" bIns="73152"/>
           <a:lstStyle/>
           <a:p>
             <a:pPr algn="l"/>
@@ -17070,11 +17098,11 @@
           <a:p>
             <a:pPr algn="l">
               <a:spcBef>
-                <a:spcPts val="600"/>
+                <a:spcPts val="500"/>
               </a:spcBef>
             </a:pPr>
             <a:r>
-              <a:rPr sz="1300" b="0">
+              <a:rPr sz="1200" b="0">
                 <a:solidFill>
                   <a:srgbClr val="FFFFFF"/>
                 </a:solidFill>
@@ -17082,17 +17110,19 @@
                 <a:ea typeface="Verdana"/>
                 <a:cs typeface="Verdana"/>
               </a:rPr>
-              <a:t>Федеральная сеть хочет централизованную 1С. Сравнивают подрядчиков.</a:t>
+              <a:t>Компания: федеральная сеть аптек «Здоровье.РФ» (региональный контур — 22 точки).
+ЛПР на встрече: Татьяна Шубина, региональный CIO.
+Ситуация: нужна централизованная 1С на регион. Сравнивают вас с крупным федеральным интегратором.</a:t>
             </a:r>
           </a:p>
           <a:p>
             <a:pPr algn="l">
               <a:spcBef>
-                <a:spcPts val="600"/>
+                <a:spcPts val="500"/>
               </a:spcBef>
             </a:pPr>
             <a:r>
-              <a:rPr sz="1300" b="0">
+              <a:rPr sz="1200" b="0">
                 <a:solidFill>
                   <a:srgbClr val="FFFFFF"/>
                 </a:solidFill>
@@ -17100,7 +17130,7 @@
                 <a:ea typeface="Verdana"/>
                 <a:cs typeface="Verdana"/>
               </a:rPr>
-              <a:t>Возражение: «Вы работаете только на Иркутск, а Первый Бит — на всю Россию: вы не потянете поддержку 24/7».</a:t>
+              <a:t>Возражение Татьяны: «Вы по сути на Иркутск. Первый Бит — на всю Россию. Вы не потянете поддержку 24/7 на сеть».</a:t>
             </a:r>
           </a:p>
         </p:txBody>
@@ -17113,8 +17143,8 @@
         </p:nvSpPr>
         <p:spPr>
           <a:xfrm>
-            <a:off x="640080" y="4251960"/>
-            <a:ext cx="8503920" cy="411480"/>
+            <a:off x="640080" y="4370832"/>
+            <a:ext cx="8503920" cy="365760"/>
           </a:xfrm>
           <a:prstGeom prst="rect">
             <a:avLst/>
@@ -17129,7 +17159,7 @@
           <a:p>
             <a:pPr algn="l"/>
             <a:r>
-              <a:rPr sz="1200" b="1">
+              <a:rPr sz="1100" b="1">
                 <a:solidFill>
                   <a:srgbClr val="F0B42E"/>
                 </a:solidFill>
@@ -17137,7 +17167,7 @@
                 <a:ea typeface="Verdana"/>
                 <a:cs typeface="Verdana"/>
               </a:rPr>
-              <a:t>Задача: Отработайте статус «локальный» и доведите до пилота/контракта.</a:t>
+              <a:t>Задача: Отработайте статус “локальный подрядчик” и доведите до пилота/контракта.</a:t>
             </a:r>
           </a:p>
         </p:txBody>
@@ -17150,8 +17180,8 @@
         </p:nvSpPr>
         <p:spPr>
           <a:xfrm>
-            <a:off x="502920" y="4709160"/>
-            <a:ext cx="8778240" cy="1325880"/>
+            <a:off x="502920" y="4754880"/>
+            <a:ext cx="8778240" cy="1234440"/>
           </a:xfrm>
           <a:prstGeom prst="roundRect">
             <a:avLst>
@@ -17211,7 +17241,7 @@
                 <a:ea typeface="Verdana"/>
                 <a:cs typeface="Verdana"/>
               </a:rPr>
-              <a:t>Факты: команда, линия, регламент, партнёрская сеть, кейсы удалёнки; предложить SLA и эскалации; пилот на регионе; не оправдываться — продавать управляемость.</a:t>
+              <a:t>Факты: команда, линия, регламент, партнёрка, удалёнка; SLA и эскалации; пилот на регионе; продавать управляемость, не оправдания.</a:t>
             </a:r>
           </a:p>
         </p:txBody>
@@ -17580,8 +17610,8 @@
         </p:nvSpPr>
         <p:spPr>
           <a:xfrm>
-            <a:off x="502920" y="1097280"/>
-            <a:ext cx="8778240" cy="3063240"/>
+            <a:off x="502920" y="1051560"/>
+            <a:ext cx="8778240" cy="3246120"/>
           </a:xfrm>
           <a:prstGeom prst="roundRect">
             <a:avLst>
@@ -17610,7 +17640,7 @@
           </a:fontRef>
         </p:style>
         <p:txBody>
-          <a:bodyPr rtlCol="0" anchor="t" wrap="square" lIns="137160" rIns="137160" tIns="91440"/>
+          <a:bodyPr rtlCol="0" anchor="t" wrap="square" lIns="128016" rIns="128016" tIns="73152" bIns="73152"/>
           <a:lstStyle/>
           <a:p>
             <a:pPr algn="l"/>
@@ -17629,11 +17659,11 @@
           <a:p>
             <a:pPr algn="l">
               <a:spcBef>
-                <a:spcPts val="600"/>
+                <a:spcPts val="500"/>
               </a:spcBef>
             </a:pPr>
             <a:r>
-              <a:rPr sz="1300" b="0">
+              <a:rPr sz="1200" b="0">
                 <a:solidFill>
                   <a:srgbClr val="FFFFFF"/>
                 </a:solidFill>
@@ -17641,17 +17671,19 @@
                 <a:ea typeface="Verdana"/>
                 <a:cs typeface="Verdana"/>
               </a:rPr>
-              <a:t>Клиент согласен смотреть 1С, но ставит условие входа.</a:t>
+              <a:t>Компания: «АгроСибХолдинг» — 5 юрлиц, разные базы 1С.
+ЛПР на встрече: Роман Сафронов, директор по развитию.
+Ситуация: готов смотреть вас как подрядчика, но ставит жёсткий вход.</a:t>
             </a:r>
           </a:p>
           <a:p>
             <a:pPr algn="l">
               <a:spcBef>
-                <a:spcPts val="600"/>
+                <a:spcPts val="500"/>
               </a:spcBef>
             </a:pPr>
             <a:r>
-              <a:rPr sz="1300" b="0">
+              <a:rPr sz="1200" b="0">
                 <a:solidFill>
                   <a:srgbClr val="FFFFFF"/>
                 </a:solidFill>
@@ -17659,7 +17691,7 @@
                 <a:ea typeface="Verdana"/>
                 <a:cs typeface="Verdana"/>
               </a:rPr>
-              <a:t>Возражение: «Пилот бесплатно на 3 месяца на всех базах — иначе не смотрим».</a:t>
+              <a:t>Возражение Романа: «Пилот бесплатно на 3 месяца сразу на всех базах — иначе даже не начинаем разговор с закупкой».</a:t>
             </a:r>
           </a:p>
         </p:txBody>
@@ -17672,8 +17704,8 @@
         </p:nvSpPr>
         <p:spPr>
           <a:xfrm>
-            <a:off x="640080" y="4251960"/>
-            <a:ext cx="8503920" cy="411480"/>
+            <a:off x="640080" y="4370832"/>
+            <a:ext cx="8503920" cy="365760"/>
           </a:xfrm>
           <a:prstGeom prst="rect">
             <a:avLst/>
@@ -17688,7 +17720,7 @@
           <a:p>
             <a:pPr algn="l"/>
             <a:r>
-              <a:rPr sz="1200" b="1">
+              <a:rPr sz="1100" b="1">
                 <a:solidFill>
                   <a:srgbClr val="F0B42E"/>
                 </a:solidFill>
@@ -17696,7 +17728,7 @@
                 <a:ea typeface="Verdana"/>
                 <a:cs typeface="Verdana"/>
               </a:rPr>
-              <a:t>Задача: Сузьте пилот так, чтобы он продавал, а не разорял — и закройте шаг.</a:t>
+              <a:t>Задача: Сузьте пилот так, чтобы он продавал, а не разорял — и закройте оплачиваемый/зачётный шаг.</a:t>
             </a:r>
           </a:p>
         </p:txBody>
@@ -17709,8 +17741,8 @@
         </p:nvSpPr>
         <p:spPr>
           <a:xfrm>
-            <a:off x="502920" y="4709160"/>
-            <a:ext cx="8778240" cy="1325880"/>
+            <a:off x="502920" y="4754880"/>
+            <a:ext cx="8778240" cy="1234440"/>
           </a:xfrm>
           <a:prstGeom prst="roundRect">
             <a:avLst>
@@ -17770,7 +17802,7 @@
                 <a:ea typeface="Verdana"/>
                 <a:cs typeface="Verdana"/>
               </a:rPr>
-              <a:t>1 юрлицо / 1 процесс / 2–4 недели; критерии успеха заранее; стоимость пилота с зачётом в проект; отказ от «всех баз бесплатно».</a:t>
+              <a:t>1 юрлицо / 1 процесс / 2–4 недели; критерии успеха заранее; стоимость пилота с зачётом в проект; отказ от “всех баз бесплатно”.</a:t>
             </a:r>
           </a:p>
         </p:txBody>
@@ -18139,8 +18171,8 @@
         </p:nvSpPr>
         <p:spPr>
           <a:xfrm>
-            <a:off x="502920" y="1097280"/>
-            <a:ext cx="8778240" cy="3063240"/>
+            <a:off x="502920" y="1051560"/>
+            <a:ext cx="8778240" cy="3246120"/>
           </a:xfrm>
           <a:prstGeom prst="roundRect">
             <a:avLst>
@@ -18169,7 +18201,7 @@
           </a:fontRef>
         </p:style>
         <p:txBody>
-          <a:bodyPr rtlCol="0" anchor="t" wrap="square" lIns="137160" rIns="137160" tIns="91440"/>
+          <a:bodyPr rtlCol="0" anchor="t" wrap="square" lIns="128016" rIns="128016" tIns="73152" bIns="73152"/>
           <a:lstStyle/>
           <a:p>
             <a:pPr algn="l"/>
@@ -18188,11 +18220,11 @@
           <a:p>
             <a:pPr algn="l">
               <a:spcBef>
-                <a:spcPts val="600"/>
+                <a:spcPts val="500"/>
               </a:spcBef>
             </a:pPr>
             <a:r>
-              <a:rPr sz="1300" b="0">
+              <a:rPr sz="1200" b="0">
                 <a:solidFill>
                   <a:srgbClr val="FFFFFF"/>
                 </a:solidFill>
@@ -18200,17 +18232,19 @@
                 <a:ea typeface="Verdana"/>
                 <a:cs typeface="Verdana"/>
               </a:rPr>
-              <a:t>Окологосударственный заказчик хочет 1С через закупку. Юристы жёсткие.</a:t>
+              <a:t>Компания: МУП «ГорСвет» (окологосударственный заказчик), закупка через процедуру.
+ЛПР на встрече: Сергей Ильин, замглавы по экономике; рядом — юрист заказчика.
+Ситуация: хотят 1С для учёта и заявок. Бюджет есть, но договорные условия жёсткие “как для подрядчика двора”.</a:t>
             </a:r>
           </a:p>
           <a:p>
             <a:pPr algn="l">
               <a:spcBef>
-                <a:spcPts val="600"/>
+                <a:spcPts val="500"/>
               </a:spcBef>
             </a:pPr>
             <a:r>
-              <a:rPr sz="1300" b="0">
+              <a:rPr sz="1200" b="0">
                 <a:solidFill>
                   <a:srgbClr val="FFFFFF"/>
                 </a:solidFill>
@@ -18218,7 +18252,7 @@
                 <a:ea typeface="Verdana"/>
                 <a:cs typeface="Verdana"/>
               </a:rPr>
-              <a:t>Возражение: «В договоре — полная материальная ответственность за любой простой и утечку; иначе закупки нет».</a:t>
+              <a:t>Возражение юриста: «В договоре — полная материальная ответственность за любой простой и любую утечку. Иначе закупки не будет».</a:t>
             </a:r>
           </a:p>
         </p:txBody>
@@ -18231,8 +18265,8 @@
         </p:nvSpPr>
         <p:spPr>
           <a:xfrm>
-            <a:off x="640080" y="4251960"/>
-            <a:ext cx="8503920" cy="411480"/>
+            <a:off x="640080" y="4370832"/>
+            <a:ext cx="8503920" cy="365760"/>
           </a:xfrm>
           <a:prstGeom prst="rect">
             <a:avLst/>
@@ -18247,7 +18281,7 @@
           <a:p>
             <a:pPr algn="l"/>
             <a:r>
-              <a:rPr sz="1200" b="1">
+              <a:rPr sz="1100" b="1">
                 <a:solidFill>
                   <a:srgbClr val="F0B42E"/>
                 </a:solidFill>
@@ -18255,7 +18289,7 @@
                 <a:ea typeface="Verdana"/>
                 <a:cs typeface="Verdana"/>
               </a:rPr>
-              <a:t>Задача: Найдите договорную конструкцию, при которой сделка возможна.</a:t>
+              <a:t>Задача: Соберите договорную конструкцию, при которой сделка ещё возможна.</a:t>
             </a:r>
           </a:p>
         </p:txBody>
@@ -18268,8 +18302,8 @@
         </p:nvSpPr>
         <p:spPr>
           <a:xfrm>
-            <a:off x="502920" y="4709160"/>
-            <a:ext cx="8778240" cy="1325880"/>
+            <a:off x="502920" y="4754880"/>
+            <a:ext cx="8778240" cy="1234440"/>
           </a:xfrm>
           <a:prstGeom prst="roundRect">
             <a:avLst>
@@ -18329,7 +18363,7 @@
                 <a:ea typeface="Verdana"/>
                 <a:cs typeface="Verdana"/>
               </a:rPr>
-              <a:t>Ограничение ответственности / страхование / исключения force majeure; зона ответственности заказчика (инфра, доступы); эскалация к своему юристу; не подписывать безлимит — предложить управляемый риск.</a:t>
+              <a:t>Лимит ответственности / страхование / исключения; зона ответственности заказчика (инфра, доступы); эскалация к своему юристу; не подписывать безлимит.</a:t>
             </a:r>
           </a:p>
         </p:txBody>
@@ -18698,8 +18732,8 @@
         </p:nvSpPr>
         <p:spPr>
           <a:xfrm>
-            <a:off x="502920" y="1097280"/>
-            <a:ext cx="8778240" cy="3063240"/>
+            <a:off x="502920" y="1051560"/>
+            <a:ext cx="8778240" cy="3246120"/>
           </a:xfrm>
           <a:prstGeom prst="roundRect">
             <a:avLst>
@@ -18728,7 +18762,7 @@
           </a:fontRef>
         </p:style>
         <p:txBody>
-          <a:bodyPr rtlCol="0" anchor="t" wrap="square" lIns="137160" rIns="137160" tIns="91440"/>
+          <a:bodyPr rtlCol="0" anchor="t" wrap="square" lIns="128016" rIns="128016" tIns="73152" bIns="73152"/>
           <a:lstStyle/>
           <a:p>
             <a:pPr algn="l"/>
@@ -18747,11 +18781,11 @@
           <a:p>
             <a:pPr algn="l">
               <a:spcBef>
-                <a:spcPts val="600"/>
+                <a:spcPts val="500"/>
               </a:spcBef>
             </a:pPr>
             <a:r>
-              <a:rPr sz="1300" b="0">
+              <a:rPr sz="1200" b="0">
                 <a:solidFill>
                   <a:srgbClr val="FFFFFF"/>
                 </a:solidFill>
@@ -18759,17 +18793,19 @@
                 <a:ea typeface="Verdana"/>
                 <a:cs typeface="Verdana"/>
               </a:rPr>
-              <a:t>IT просит нормальный контур обновлений и поддержки 1С: сейчас всё держится на одном внутреннем специалисте.</a:t>
+              <a:t>Компания: «ТехноПарк Сибирь» — управление площадками, 1С на поддержке одного внутреннего специалиста.
+ЛПР на встрече: Евгений Карпов, руководитель IT.
+Ситуация: Евгений хочет нормальный контур обновлений и линию поддержки 1С, чтобы “не тушить ночами”. Но боится внутренних согласований.</a:t>
             </a:r>
           </a:p>
           <a:p>
             <a:pPr algn="l">
               <a:spcBef>
-                <a:spcPts val="600"/>
+                <a:spcPts val="500"/>
               </a:spcBef>
             </a:pPr>
             <a:r>
-              <a:rPr sz="1300" b="0">
+              <a:rPr sz="1200" b="0">
                 <a:solidFill>
                   <a:srgbClr val="FFFFFF"/>
                 </a:solidFill>
@@ -18777,7 +18813,7 @@
                 <a:ea typeface="Verdana"/>
                 <a:cs typeface="Verdana"/>
               </a:rPr>
-              <a:t>Возражение: «Надо согласовать с закупками, бухгалтерией и охраной труда — это на месяцы».</a:t>
+              <a:t>Возражение Евгения: «Надо согласовать с закупками, бухгалтерией и охраной труда — это на месяцы. Давайте после НГ».</a:t>
             </a:r>
           </a:p>
         </p:txBody>
@@ -18790,8 +18826,8 @@
         </p:nvSpPr>
         <p:spPr>
           <a:xfrm>
-            <a:off x="640080" y="4251960"/>
-            <a:ext cx="8503920" cy="411480"/>
+            <a:off x="640080" y="4370832"/>
+            <a:ext cx="8503920" cy="365760"/>
           </a:xfrm>
           <a:prstGeom prst="rect">
             <a:avLst/>
@@ -18806,7 +18842,7 @@
           <a:p>
             <a:pPr algn="l"/>
             <a:r>
-              <a:rPr sz="1200" b="1">
+              <a:rPr sz="1100" b="1">
                 <a:solidFill>
                   <a:srgbClr val="F0B42E"/>
                 </a:solidFill>
@@ -18814,7 +18850,7 @@
                 <a:ea typeface="Verdana"/>
                 <a:cs typeface="Verdana"/>
               </a:rPr>
-              <a:t>Задача: Превратите «согласования на месяцы» в управляемый план продажи.</a:t>
+              <a:t>Задача: Превратите “согласования на месяцы” в управляемый план продажи.</a:t>
             </a:r>
           </a:p>
         </p:txBody>
@@ -18827,8 +18863,8 @@
         </p:nvSpPr>
         <p:spPr>
           <a:xfrm>
-            <a:off x="502920" y="4709160"/>
-            <a:ext cx="8778240" cy="1325880"/>
+            <a:off x="502920" y="4754880"/>
+            <a:ext cx="8778240" cy="1234440"/>
           </a:xfrm>
           <a:prstGeom prst="roundRect">
             <a:avLst>
@@ -18888,7 +18924,7 @@
                 <a:ea typeface="Verdana"/>
                 <a:cs typeface="Verdana"/>
               </a:rPr>
-              <a:t>Карта стейкхолдеров и их интересов; короткий one-pager под каждую роль; предложить kick-off на 30 минут со всеми; параллелить, не ждать цепочку.</a:t>
+              <a:t>Карта стейкхолдеров; one-pager под каждую роль; kick-off 30 минут со всеми; параллелить согласования, не ждать цепочку.</a:t>
             </a:r>
           </a:p>
         </p:txBody>
@@ -19257,8 +19293,8 @@
         </p:nvSpPr>
         <p:spPr>
           <a:xfrm>
-            <a:off x="502920" y="1097280"/>
-            <a:ext cx="8778240" cy="3063240"/>
+            <a:off x="502920" y="1051560"/>
+            <a:ext cx="8778240" cy="3246120"/>
           </a:xfrm>
           <a:prstGeom prst="roundRect">
             <a:avLst>
@@ -19287,7 +19323,7 @@
           </a:fontRef>
         </p:style>
         <p:txBody>
-          <a:bodyPr rtlCol="0" anchor="t" wrap="square" lIns="137160" rIns="137160" tIns="91440"/>
+          <a:bodyPr rtlCol="0" anchor="t" wrap="square" lIns="128016" rIns="128016" tIns="73152" bIns="73152"/>
           <a:lstStyle/>
           <a:p>
             <a:pPr algn="l"/>
@@ -19306,11 +19342,11 @@
           <a:p>
             <a:pPr algn="l">
               <a:spcBef>
-                <a:spcPts val="600"/>
+                <a:spcPts val="500"/>
               </a:spcBef>
             </a:pPr>
             <a:r>
-              <a:rPr sz="1300" b="0">
+              <a:rPr sz="1200" b="0">
                 <a:solidFill>
                   <a:srgbClr val="FFFFFF"/>
                 </a:solidFill>
@@ -19318,17 +19354,19 @@
                 <a:ea typeface="Verdana"/>
                 <a:cs typeface="Verdana"/>
               </a:rPr>
-              <a:t>Главбух хочет ускорить отчётность в 1С и явно ваш сторонник.</a:t>
+              <a:t>Компания: «БайкалДент» — сеть стоматологий, 4 клиники.
+ЛПР на встрече: Мария Соловьёва, главбух (явный чемпион сделки).
+Ситуация: Мария хочет ускорить отчётность и кадровый контур в 1С:ЗУП. Директор сети в разъездах, до него не достучаться.</a:t>
             </a:r>
           </a:p>
           <a:p>
             <a:pPr algn="l">
               <a:spcBef>
-                <a:spcPts val="600"/>
+                <a:spcPts val="500"/>
               </a:spcBef>
             </a:pPr>
             <a:r>
-              <a:rPr sz="1300" b="0">
+              <a:rPr sz="1200" b="0">
                 <a:solidFill>
                   <a:srgbClr val="FFFFFF"/>
                 </a:solidFill>
@@ -19336,7 +19374,7 @@
                 <a:ea typeface="Verdana"/>
                 <a:cs typeface="Verdana"/>
               </a:rPr>
-              <a:t>Возражение: «Я не ЛПР, решает директор — и он недоступен».</a:t>
+              <a:t>Возражение Марии: «Я не ЛПР. Решает директор — и он недоступен две недели. Я могу только “посоветовать”».</a:t>
             </a:r>
           </a:p>
         </p:txBody>
@@ -19349,8 +19387,8 @@
         </p:nvSpPr>
         <p:spPr>
           <a:xfrm>
-            <a:off x="640080" y="4251960"/>
-            <a:ext cx="8503920" cy="411480"/>
+            <a:off x="640080" y="4370832"/>
+            <a:ext cx="8503920" cy="365760"/>
           </a:xfrm>
           <a:prstGeom prst="rect">
             <a:avLst/>
@@ -19365,7 +19403,7 @@
           <a:p>
             <a:pPr algn="l"/>
             <a:r>
-              <a:rPr sz="1200" b="1">
+              <a:rPr sz="1100" b="1">
                 <a:solidFill>
                   <a:srgbClr val="F0B42E"/>
                 </a:solidFill>
@@ -19373,7 +19411,7 @@
                 <a:ea typeface="Verdana"/>
                 <a:cs typeface="Verdana"/>
               </a:rPr>
-              <a:t>Задача: Используйте чемпиона и доберите доступ к ЛПР / решение.</a:t>
+              <a:t>Задача: Используйте чемпиона и доберите доступ к ЛПР / решение о следующем шаге.</a:t>
             </a:r>
           </a:p>
         </p:txBody>
@@ -19386,8 +19424,8 @@
         </p:nvSpPr>
         <p:spPr>
           <a:xfrm>
-            <a:off x="502920" y="4709160"/>
-            <a:ext cx="8778240" cy="1325880"/>
+            <a:off x="502920" y="4754880"/>
+            <a:ext cx="8778240" cy="1234440"/>
           </a:xfrm>
           <a:prstGeom prst="roundRect">
             <a:avLst>
@@ -19447,7 +19485,7 @@
                 <a:ea typeface="Verdana"/>
                 <a:cs typeface="Verdana"/>
               </a:rPr>
-              <a:t>Попросить интро/слот у директора; дать главбуху «скрипт ценности» на 5 минут; письмо от вас + от неё; альтернатива — короткий созвон в окне директора.</a:t>
+              <a:t>Интро/слот у директора; скрипт ценности на 5 минут для главбуха; письмо “от неё + от вас”; короткий созвон в окне директора.</a:t>
             </a:r>
           </a:p>
         </p:txBody>
@@ -19816,8 +19854,8 @@
         </p:nvSpPr>
         <p:spPr>
           <a:xfrm>
-            <a:off x="502920" y="1097280"/>
-            <a:ext cx="8778240" cy="3063240"/>
+            <a:off x="502920" y="1051560"/>
+            <a:ext cx="8778240" cy="3246120"/>
           </a:xfrm>
           <a:prstGeom prst="roundRect">
             <a:avLst>
@@ -19846,7 +19884,7 @@
           </a:fontRef>
         </p:style>
         <p:txBody>
-          <a:bodyPr rtlCol="0" anchor="t" wrap="square" lIns="137160" rIns="137160" tIns="91440"/>
+          <a:bodyPr rtlCol="0" anchor="t" wrap="square" lIns="128016" rIns="128016" tIns="73152" bIns="73152"/>
           <a:lstStyle/>
           <a:p>
             <a:pPr algn="l"/>
@@ -19865,11 +19903,11 @@
           <a:p>
             <a:pPr algn="l">
               <a:spcBef>
-                <a:spcPts val="600"/>
+                <a:spcPts val="500"/>
               </a:spcBef>
             </a:pPr>
             <a:r>
-              <a:rPr sz="1300" b="0">
+              <a:rPr sz="1200" b="0">
                 <a:solidFill>
                   <a:srgbClr val="FFFFFF"/>
                 </a:solidFill>
@@ -19877,17 +19915,19 @@
                 <a:ea typeface="Verdana"/>
                 <a:cs typeface="Verdana"/>
               </a:rPr>
-              <a:t>Руководитель продаж хочет воронку и дисциплину сделок в 1С/CRM.</a:t>
+              <a:t>Компания: «АвтоДом Восток» — дилерский центр.
+ЛПР на встрече: Илья Воронов, руководитель продаж.
+Ситуация: Илья хочет воронку и дисциплину сделок (CRM/1С). Бюджет коммерции готов. IT-блок пишет в чат: “новых вендоров не пускаем”.</a:t>
             </a:r>
           </a:p>
           <a:p>
             <a:pPr algn="l">
               <a:spcBef>
-                <a:spcPts val="600"/>
+                <a:spcPts val="500"/>
               </a:spcBef>
             </a:pPr>
             <a:r>
-              <a:rPr sz="1300" b="0">
+              <a:rPr sz="1200" b="0">
                 <a:solidFill>
                   <a:srgbClr val="FFFFFF"/>
                 </a:solidFill>
@@ -19895,7 +19935,7 @@
                 <a:ea typeface="Verdana"/>
                 <a:cs typeface="Verdana"/>
               </a:rPr>
-              <a:t>Возражение: «IT против любого нового вендора».</a:t>
+              <a:t>Возражение Ильи: «IT против любого нового вендора. Без них счёт не проведут».</a:t>
             </a:r>
           </a:p>
         </p:txBody>
@@ -19908,8 +19948,8 @@
         </p:nvSpPr>
         <p:spPr>
           <a:xfrm>
-            <a:off x="640080" y="4251960"/>
-            <a:ext cx="8503920" cy="411480"/>
+            <a:off x="640080" y="4370832"/>
+            <a:ext cx="8503920" cy="365760"/>
           </a:xfrm>
           <a:prstGeom prst="rect">
             <a:avLst/>
@@ -19924,7 +19964,7 @@
           <a:p>
             <a:pPr algn="l"/>
             <a:r>
-              <a:rPr sz="1200" b="1">
+              <a:rPr sz="1100" b="1">
                 <a:solidFill>
                   <a:srgbClr val="F0B42E"/>
                 </a:solidFill>
@@ -19945,8 +19985,8 @@
         </p:nvSpPr>
         <p:spPr>
           <a:xfrm>
-            <a:off x="502920" y="4709160"/>
-            <a:ext cx="8778240" cy="1325880"/>
+            <a:off x="502920" y="4754880"/>
+            <a:ext cx="8778240" cy="1234440"/>
           </a:xfrm>
           <a:prstGeom prst="roundRect">
             <a:avLst>
@@ -20006,7 +20046,7 @@
                 <a:ea typeface="Verdana"/>
                 <a:cs typeface="Verdana"/>
               </a:rPr>
-              <a:t>Выяснить реальные страхи IT (интеграции, безопасность, нагрузка); пригласить IT на демо с их чек-листом; продавать архитектуру и сопровождение, не только «хотелки продаж».</a:t>
+              <a:t>Выяснить страхи IT; демо с их чек-листом; продавать архитектуру и сопровождение, не только хотелки продаж.</a:t>
             </a:r>
           </a:p>
         </p:txBody>
@@ -20375,8 +20415,8 @@
         </p:nvSpPr>
         <p:spPr>
           <a:xfrm>
-            <a:off x="502920" y="1097280"/>
-            <a:ext cx="8778240" cy="3063240"/>
+            <a:off x="502920" y="1051560"/>
+            <a:ext cx="8778240" cy="3246120"/>
           </a:xfrm>
           <a:prstGeom prst="roundRect">
             <a:avLst>
@@ -20405,7 +20445,7 @@
           </a:fontRef>
         </p:style>
         <p:txBody>
-          <a:bodyPr rtlCol="0" anchor="t" wrap="square" lIns="137160" rIns="137160" tIns="91440"/>
+          <a:bodyPr rtlCol="0" anchor="t" wrap="square" lIns="128016" rIns="128016" tIns="73152" bIns="73152"/>
           <a:lstStyle/>
           <a:p>
             <a:pPr algn="l"/>
@@ -20424,11 +20464,11 @@
           <a:p>
             <a:pPr algn="l">
               <a:spcBef>
-                <a:spcPts val="600"/>
+                <a:spcPts val="500"/>
               </a:spcBef>
             </a:pPr>
             <a:r>
-              <a:rPr sz="1300" b="0">
+              <a:rPr sz="1200" b="0">
                 <a:solidFill>
                   <a:srgbClr val="FFFFFF"/>
                 </a:solidFill>
@@ -20436,17 +20476,19 @@
                 <a:ea typeface="Verdana"/>
                 <a:cs typeface="Verdana"/>
               </a:rPr>
-              <a:t>Сеть из трёх розничных магазинов ищет решение для учёта остатков и продаж. Собственник сам на встрече, боль понятная: расхождения по складу и ручные своды в Excel. Вы предложили 1С:Розница / УТ с небольшим проектом внедрения.</a:t>
+              <a:t>Компания: ООО «Северный Вкус» — 3 продуктовых магазина в Иркутске (штат ~45 человек).
+ЛПР на встрече: Андрей Козлов, собственник.
+Ситуация: остатки «плывут», каждую неделю ручная сверка Excel и 1С:БП. Андрей сам считает недополученную маржу и зовёт вас поставить нормальный розничный контур (1С:Розница/УТ) с запуском за 1,5–2 месяца. Вы озвучили вилку по лицензиям + работам.</a:t>
             </a:r>
           </a:p>
           <a:p>
             <a:pPr algn="l">
               <a:spcBef>
-                <a:spcPts val="600"/>
+                <a:spcPts val="500"/>
               </a:spcBef>
             </a:pPr>
             <a:r>
-              <a:rPr sz="1300" b="0">
+              <a:rPr sz="1200" b="0">
                 <a:solidFill>
                   <a:srgbClr val="FFFFFF"/>
                 </a:solidFill>
@@ -20454,7 +20496,7 @@
                 <a:ea typeface="Verdana"/>
                 <a:cs typeface="Verdana"/>
               </a:rPr>
-              <a:t>Возражение: «Дорого, мы думали до 50 тысяч».</a:t>
+              <a:t>Возражение Андрея: «Дорого. Мы в голове держали до 50 тысяч — как за кассы».</a:t>
             </a:r>
           </a:p>
         </p:txBody>
@@ -20467,8 +20509,8 @@
         </p:nvSpPr>
         <p:spPr>
           <a:xfrm>
-            <a:off x="640080" y="4251960"/>
-            <a:ext cx="8503920" cy="411480"/>
+            <a:off x="640080" y="4370832"/>
+            <a:ext cx="8503920" cy="365760"/>
           </a:xfrm>
           <a:prstGeom prst="rect">
             <a:avLst/>
@@ -20483,7 +20525,7 @@
           <a:p>
             <a:pPr algn="l"/>
             <a:r>
-              <a:rPr sz="1200" b="1">
+              <a:rPr sz="1100" b="1">
                 <a:solidFill>
                   <a:srgbClr val="F0B42E"/>
                 </a:solidFill>
@@ -20491,7 +20533,7 @@
                 <a:ea typeface="Verdana"/>
                 <a:cs typeface="Verdana"/>
               </a:rPr>
-              <a:t>Задача: Отработайте возражение и приведите к следующему шагу покупки.</a:t>
+              <a:t>Задача: Отработайте ценовое возражение и выведите на следующий шаг к покупке.</a:t>
             </a:r>
           </a:p>
         </p:txBody>
@@ -20504,8 +20546,8 @@
         </p:nvSpPr>
         <p:spPr>
           <a:xfrm>
-            <a:off x="502920" y="4709160"/>
-            <a:ext cx="8778240" cy="1325880"/>
+            <a:off x="502920" y="4754880"/>
+            <a:ext cx="8778240" cy="1234440"/>
           </a:xfrm>
           <a:prstGeom prst="roundRect">
             <a:avLst>
@@ -20565,7 +20607,7 @@
                 <a:ea typeface="Verdana"/>
                 <a:cs typeface="Verdana"/>
               </a:rPr>
-              <a:t>Уточнить, из чего сложилась «цифра 50 тыс.»; разложить стоимость (лицензии / работы / сопровождение); показать цену ошибки учёта на 3 магазинах; предложить MVP на одном магазине или этапность.</a:t>
+              <a:t>Разобрать, откуда взялись «50 тыс.»; разложить лицензии/работы/сопровождение; посчитать цену ошибок остатков на 3 точках; предложить старт с одного магазина или этапность; зафиксировать дату следующего шага (счёт / договор / обследование).</a:t>
             </a:r>
           </a:p>
         </p:txBody>
@@ -20934,8 +20976,8 @@
         </p:nvSpPr>
         <p:spPr>
           <a:xfrm>
-            <a:off x="502920" y="1097280"/>
-            <a:ext cx="8778240" cy="3063240"/>
+            <a:off x="502920" y="1051560"/>
+            <a:ext cx="8778240" cy="3246120"/>
           </a:xfrm>
           <a:prstGeom prst="roundRect">
             <a:avLst>
@@ -20964,7 +21006,7 @@
           </a:fontRef>
         </p:style>
         <p:txBody>
-          <a:bodyPr rtlCol="0" anchor="t" wrap="square" lIns="137160" rIns="137160" tIns="91440"/>
+          <a:bodyPr rtlCol="0" anchor="t" wrap="square" lIns="128016" rIns="128016" tIns="73152" bIns="73152"/>
           <a:lstStyle/>
           <a:p>
             <a:pPr algn="l"/>
@@ -20983,11 +21025,11 @@
           <a:p>
             <a:pPr algn="l">
               <a:spcBef>
-                <a:spcPts val="600"/>
+                <a:spcPts val="500"/>
               </a:spcBef>
             </a:pPr>
             <a:r>
-              <a:rPr sz="1300" b="0">
+              <a:rPr sz="1200" b="0">
                 <a:solidFill>
                   <a:srgbClr val="FFFFFF"/>
                 </a:solidFill>
@@ -20995,17 +21037,19 @@
                 <a:ea typeface="Verdana"/>
                 <a:cs typeface="Verdana"/>
               </a:rPr>
-              <a:t>Собственник хочет прозрачную финмодель и управленку на 1С.</a:t>
+              <a:t>Компания: группа «РесурсКапитал» — УК + 3 операционных бизнеса.
+ЛПР на встрече: Александр Тимченко, собственник.
+Ситуация: Александр хочет прозрачную финмодель. Финдир тянет в одну архитектуру 1С, IT — в другую (свой стек + “потом обмены”). Проект стоит.</a:t>
             </a:r>
           </a:p>
           <a:p>
             <a:pPr algn="l">
               <a:spcBef>
-                <a:spcPts val="600"/>
+                <a:spcPts val="500"/>
               </a:spcBef>
             </a:pPr>
             <a:r>
-              <a:rPr sz="1300" b="0">
+              <a:rPr sz="1200" b="0">
                 <a:solidFill>
                   <a:srgbClr val="FFFFFF"/>
                 </a:solidFill>
@@ -21013,7 +21057,7 @@
                 <a:ea typeface="Verdana"/>
                 <a:cs typeface="Verdana"/>
               </a:rPr>
-              <a:t>Возражение: «Финдир и IT тянут в разные решения и блокируют друг друга».</a:t>
+              <a:t>Возражение Александра: «Финдир и IT блокируют друг друга. Я не хочу быть судьёй — разберитесь сами или приходите, когда договорятся».</a:t>
             </a:r>
           </a:p>
         </p:txBody>
@@ -21026,8 +21070,8 @@
         </p:nvSpPr>
         <p:spPr>
           <a:xfrm>
-            <a:off x="640080" y="4251960"/>
-            <a:ext cx="8503920" cy="411480"/>
+            <a:off x="640080" y="4370832"/>
+            <a:ext cx="8503920" cy="365760"/>
           </a:xfrm>
           <a:prstGeom prst="rect">
             <a:avLst/>
@@ -21042,7 +21086,7 @@
           <a:p>
             <a:pPr algn="l"/>
             <a:r>
-              <a:rPr sz="1200" b="1">
+              <a:rPr sz="1100" b="1">
                 <a:solidFill>
                   <a:srgbClr val="F0B42E"/>
                 </a:solidFill>
@@ -21063,8 +21107,8 @@
         </p:nvSpPr>
         <p:spPr>
           <a:xfrm>
-            <a:off x="502920" y="4709160"/>
-            <a:ext cx="8778240" cy="1325880"/>
+            <a:off x="502920" y="4754880"/>
+            <a:ext cx="8778240" cy="1234440"/>
           </a:xfrm>
           <a:prstGeom prst="roundRect">
             <a:avLst>
@@ -21124,7 +21168,7 @@
                 <a:ea typeface="Verdana"/>
                 <a:cs typeface="Verdana"/>
               </a:rPr>
-              <a:t>Фасилитирующая встреча с повесткой критериев выбора; матрица требований фин/IT; роль собственника как арбитра; PoC под общие KPI.</a:t>
+              <a:t>Фасилитация с критериями выбора; матрица требований фин/IT; роль собственника как арбитра; PoC под общие KPI.</a:t>
             </a:r>
           </a:p>
         </p:txBody>
@@ -21493,8 +21537,8 @@
         </p:nvSpPr>
         <p:spPr>
           <a:xfrm>
-            <a:off x="502920" y="1097280"/>
-            <a:ext cx="8778240" cy="3063240"/>
+            <a:off x="502920" y="1051560"/>
+            <a:ext cx="8778240" cy="3246120"/>
           </a:xfrm>
           <a:prstGeom prst="roundRect">
             <a:avLst>
@@ -21523,7 +21567,7 @@
           </a:fontRef>
         </p:style>
         <p:txBody>
-          <a:bodyPr rtlCol="0" anchor="t" wrap="square" lIns="137160" rIns="137160" tIns="91440"/>
+          <a:bodyPr rtlCol="0" anchor="t" wrap="square" lIns="128016" rIns="128016" tIns="73152" bIns="73152"/>
           <a:lstStyle/>
           <a:p>
             <a:pPr algn="l"/>
@@ -21542,11 +21586,11 @@
           <a:p>
             <a:pPr algn="l">
               <a:spcBef>
-                <a:spcPts val="600"/>
+                <a:spcPts val="500"/>
               </a:spcBef>
             </a:pPr>
             <a:r>
-              <a:rPr sz="1300" b="0">
+              <a:rPr sz="1200" b="0">
                 <a:solidFill>
                   <a:srgbClr val="FFFFFF"/>
                 </a:solidFill>
@@ -21554,17 +21598,19 @@
                 <a:ea typeface="Verdana"/>
                 <a:cs typeface="Verdana"/>
               </a:rPr>
-              <a:t>По сути вы уже выиграли: вас хвалят, объём понятен. Но всё уходит в формальный тендер.</a:t>
+              <a:t>Компания: «ГорноДобыча Плюс» — средний промзаказчик.
+ЛПР на встрече: Вера Лапина, руководитель проектного офиса.
+Ситуация: по сути вас уже выбрали: хвалят демо и команду. Но закупки обязаны провести формальный тендер.</a:t>
             </a:r>
           </a:p>
           <a:p>
             <a:pPr algn="l">
               <a:spcBef>
-                <a:spcPts val="600"/>
+                <a:spcPts val="500"/>
               </a:spcBef>
             </a:pPr>
             <a:r>
-              <a:rPr sz="1300" b="0">
+              <a:rPr sz="1200" b="0">
                 <a:solidFill>
                   <a:srgbClr val="FFFFFF"/>
                 </a:solidFill>
@@ -21572,7 +21618,7 @@
                 <a:ea typeface="Verdana"/>
                 <a:cs typeface="Verdana"/>
               </a:rPr>
-              <a:t>Возражение: «По регламенту победит тот, у кого ниже цена в конверте».</a:t>
+              <a:t>Возражение Веры: «По регламенту победит тот, у кого ниже цена в конверте. Я ничего не могу сделать — только ваш демпинг».</a:t>
             </a:r>
           </a:p>
         </p:txBody>
@@ -21585,8 +21631,8 @@
         </p:nvSpPr>
         <p:spPr>
           <a:xfrm>
-            <a:off x="640080" y="4251960"/>
-            <a:ext cx="8503920" cy="411480"/>
+            <a:off x="640080" y="4370832"/>
+            <a:ext cx="8503920" cy="365760"/>
           </a:xfrm>
           <a:prstGeom prst="rect">
             <a:avLst/>
@@ -21601,7 +21647,7 @@
           <a:p>
             <a:pPr algn="l"/>
             <a:r>
-              <a:rPr sz="1200" b="1">
+              <a:rPr sz="1100" b="1">
                 <a:solidFill>
                   <a:srgbClr val="F0B42E"/>
                 </a:solidFill>
@@ -21609,7 +21655,7 @@
                 <a:ea typeface="Verdana"/>
                 <a:cs typeface="Verdana"/>
               </a:rPr>
-              <a:t>Задача: Усильте неценовые критерии и сохраните шанс на победу/сделку.</a:t>
+              <a:t>Задача: Усильте неценовые критерии и сохраните шанс на победу без убийства маржи.</a:t>
             </a:r>
           </a:p>
         </p:txBody>
@@ -21622,8 +21668,8 @@
         </p:nvSpPr>
         <p:spPr>
           <a:xfrm>
-            <a:off x="502920" y="4709160"/>
-            <a:ext cx="8778240" cy="1325880"/>
+            <a:off x="502920" y="4754880"/>
+            <a:ext cx="8778240" cy="1234440"/>
           </a:xfrm>
           <a:prstGeom prst="roundRect">
             <a:avLst>
@@ -21683,7 +21729,7 @@
                 <a:ea typeface="Verdana"/>
                 <a:cs typeface="Verdana"/>
               </a:rPr>
-              <a:t>Помочь заказчику заложить качество, SLA, опыт, сроки в критерии; разбить лоты; ТЗ, где демпинг опасен; параллельно — ценность для ЛПР.</a:t>
+              <a:t>Помочь заложить SLA/опыт/сроки в критерии; разбить лоты; ТЗ, где демпинг опасен; параллельно усиливать ценность для ЛПР.</a:t>
             </a:r>
           </a:p>
         </p:txBody>
@@ -22052,8 +22098,8 @@
         </p:nvSpPr>
         <p:spPr>
           <a:xfrm>
-            <a:off x="502920" y="1097280"/>
-            <a:ext cx="8778240" cy="3063240"/>
+            <a:off x="502920" y="1051560"/>
+            <a:ext cx="8778240" cy="3246120"/>
           </a:xfrm>
           <a:prstGeom prst="roundRect">
             <a:avLst>
@@ -22082,7 +22128,7 @@
           </a:fontRef>
         </p:style>
         <p:txBody>
-          <a:bodyPr rtlCol="0" anchor="t" wrap="square" lIns="137160" rIns="137160" tIns="91440"/>
+          <a:bodyPr rtlCol="0" anchor="t" wrap="square" lIns="128016" rIns="128016" tIns="73152" bIns="73152"/>
           <a:lstStyle/>
           <a:p>
             <a:pPr algn="l"/>
@@ -22101,11 +22147,11 @@
           <a:p>
             <a:pPr algn="l">
               <a:spcBef>
-                <a:spcPts val="600"/>
+                <a:spcPts val="500"/>
               </a:spcBef>
             </a:pPr>
             <a:r>
-              <a:rPr sz="1300" b="0">
+              <a:rPr sz="1200" b="0">
                 <a:solidFill>
                   <a:srgbClr val="FFFFFF"/>
                 </a:solidFill>
@@ -22113,17 +22159,19 @@
                 <a:ea typeface="Verdana"/>
                 <a:cs typeface="Verdana"/>
               </a:rPr>
-              <a:t>Договор почти подписан, предоплата согласована.</a:t>
+              <a:t>Компания: «ИнноТех Сибирь» — ИТ-интегратор у заказчика (ваш конечный клиент через них), проект 1С почти на подписании.
+ЛПР на встрече: бывший спонсор — Пётр Максимов (IT-директор заказчика), вчера уволился; новый директор — Алина Котова.
+Ситуация: договор и предоплата были согласованы с Петром. Алина на первом созвоне ставит всё на паузу.</a:t>
             </a:r>
           </a:p>
           <a:p>
             <a:pPr algn="l">
               <a:spcBef>
-                <a:spcPts val="600"/>
+                <a:spcPts val="500"/>
               </a:spcBef>
             </a:pPr>
             <a:r>
-              <a:rPr sz="1300" b="0">
+              <a:rPr sz="1200" b="0">
                 <a:solidFill>
                   <a:srgbClr val="FFFFFF"/>
                 </a:solidFill>
@@ -22131,7 +22179,7 @@
                 <a:ea typeface="Verdana"/>
                 <a:cs typeface="Verdana"/>
               </a:rPr>
-              <a:t>Возражение: «Наш внутренний спонсор уволился вчера; новый директор всё ставит на паузу».</a:t>
+              <a:t>Возражение Алины: «Я всё ставлю на паузу. Мне нужно 2 месяца войти в курс. Переписку с Петром не считаю основанием».</a:t>
             </a:r>
           </a:p>
         </p:txBody>
@@ -22144,8 +22192,8 @@
         </p:nvSpPr>
         <p:spPr>
           <a:xfrm>
-            <a:off x="640080" y="4251960"/>
-            <a:ext cx="8503920" cy="411480"/>
+            <a:off x="640080" y="4370832"/>
+            <a:ext cx="8503920" cy="365760"/>
           </a:xfrm>
           <a:prstGeom prst="rect">
             <a:avLst/>
@@ -22160,7 +22208,7 @@
           <a:p>
             <a:pPr algn="l"/>
             <a:r>
-              <a:rPr sz="1200" b="1">
+              <a:rPr sz="1100" b="1">
                 <a:solidFill>
                   <a:srgbClr val="F0B42E"/>
                 </a:solidFill>
@@ -22168,7 +22216,7 @@
                 <a:ea typeface="Verdana"/>
                 <a:cs typeface="Verdana"/>
               </a:rPr>
-              <a:t>Задача: За 48 часов спасите сделку или пересоберите цикл продажи.</a:t>
+              <a:t>Задача: За 48 часов спасите сделку или пересоберите цикл под нового ЛПР.</a:t>
             </a:r>
           </a:p>
         </p:txBody>
@@ -22181,8 +22229,8 @@
         </p:nvSpPr>
         <p:spPr>
           <a:xfrm>
-            <a:off x="502920" y="4709160"/>
-            <a:ext cx="8778240" cy="1325880"/>
+            <a:off x="502920" y="4754880"/>
+            <a:ext cx="8778240" cy="1234440"/>
           </a:xfrm>
           <a:prstGeom prst="roundRect">
             <a:avLst>
@@ -22242,7 +22290,7 @@
                 <a:ea typeface="Verdana"/>
                 <a:cs typeface="Verdana"/>
               </a:rPr>
-              <a:t>Срочно найти нового спонсора/влиятельных союзников; brief для нового директора (проблема→эффект→статус); предложить паузу с рамками, не исчезновение; мини-демо ценности под его KPI.</a:t>
+              <a:t>Найти новых союзников; brief для Алины (проблема→эффект→статус); пауза с рамками; мини-демо под её KPI; не исчезнуть “до лучших времён”.</a:t>
             </a:r>
           </a:p>
         </p:txBody>
@@ -22611,8 +22659,8 @@
         </p:nvSpPr>
         <p:spPr>
           <a:xfrm>
-            <a:off x="502920" y="1097280"/>
-            <a:ext cx="8778240" cy="3063240"/>
+            <a:off x="502920" y="1051560"/>
+            <a:ext cx="8778240" cy="3246120"/>
           </a:xfrm>
           <a:prstGeom prst="roundRect">
             <a:avLst>
@@ -22641,7 +22689,7 @@
           </a:fontRef>
         </p:style>
         <p:txBody>
-          <a:bodyPr rtlCol="0" anchor="t" wrap="square" lIns="137160" rIns="137160" tIns="91440"/>
+          <a:bodyPr rtlCol="0" anchor="t" wrap="square" lIns="128016" rIns="128016" tIns="73152" bIns="73152"/>
           <a:lstStyle/>
           <a:p>
             <a:pPr algn="l"/>
@@ -22660,11 +22708,11 @@
           <a:p>
             <a:pPr algn="l">
               <a:spcBef>
-                <a:spcPts val="600"/>
+                <a:spcPts val="500"/>
               </a:spcBef>
             </a:pPr>
             <a:r>
-              <a:rPr sz="1300" b="0">
+              <a:rPr sz="1100" b="0">
                 <a:solidFill>
                   <a:srgbClr val="FFFFFF"/>
                 </a:solidFill>
@@ -22672,17 +22720,19 @@
                 <a:ea typeface="Verdana"/>
                 <a:cs typeface="Verdana"/>
               </a:rPr>
-              <a:t>Производственная компания просит автоматизировать склад и цех: нужны остатки, серии, передача в производство. Есть согласованный интерес у начальника производства.</a:t>
+              <a:t>Компания: АО «СибТехМаш» — производство комплектующих, 120 сотрудников, цех + склад комплектации.
+ЛПР на встрече: Ирина Белова, начальник производства (бюджет формально у финдиректора).
+Ситуация: срывы смен из‑за «потерянных» серий на складе. Ирина продавила интерес к автоматизации склада и передачи в цех на базе 1С. Параллельно закуплен новый сервер и ТСД — железо уже в пути.</a:t>
             </a:r>
           </a:p>
           <a:p>
             <a:pPr algn="l">
               <a:spcBef>
-                <a:spcPts val="600"/>
+                <a:spcPts val="500"/>
               </a:spcBef>
             </a:pPr>
             <a:r>
-              <a:rPr sz="1300" b="0">
+              <a:rPr sz="1100" b="0">
                 <a:solidFill>
                   <a:srgbClr val="FFFFFF"/>
                 </a:solidFill>
@@ -22690,7 +22740,7 @@
                 <a:ea typeface="Verdana"/>
                 <a:cs typeface="Verdana"/>
               </a:rPr>
-              <a:t>Возражение: «В этом году бюджет только на железо, софт — потом».</a:t>
+              <a:t>Возражение Ирины (со слов финдира): «В этом году бюджет только на железо. Софт — в следующем. Давайте пока просто “подключим сканеры к Excel”».</a:t>
             </a:r>
           </a:p>
         </p:txBody>
@@ -22703,8 +22753,8 @@
         </p:nvSpPr>
         <p:spPr>
           <a:xfrm>
-            <a:off x="640080" y="4251960"/>
-            <a:ext cx="8503920" cy="411480"/>
+            <a:off x="640080" y="4370832"/>
+            <a:ext cx="8503920" cy="365760"/>
           </a:xfrm>
           <a:prstGeom prst="rect">
             <a:avLst/>
@@ -22719,7 +22769,7 @@
           <a:p>
             <a:pPr algn="l"/>
             <a:r>
-              <a:rPr sz="1200" b="1">
+              <a:rPr sz="1100" b="1">
                 <a:solidFill>
                   <a:srgbClr val="F0B42E"/>
                 </a:solidFill>
@@ -22727,7 +22777,7 @@
                 <a:ea typeface="Verdana"/>
                 <a:cs typeface="Verdana"/>
               </a:rPr>
-              <a:t>Задача: Отработайте возражение и приведите к покупке / фиксации сделки.</a:t>
+              <a:t>Задача: Свяжите уже купленное железо с продажей 1С и доведите до фиксации сделки.</a:t>
             </a:r>
           </a:p>
         </p:txBody>
@@ -22740,8 +22790,8 @@
         </p:nvSpPr>
         <p:spPr>
           <a:xfrm>
-            <a:off x="502920" y="4709160"/>
-            <a:ext cx="8778240" cy="1325880"/>
+            <a:off x="502920" y="4754880"/>
+            <a:ext cx="8778240" cy="1234440"/>
           </a:xfrm>
           <a:prstGeom prst="roundRect">
             <a:avLst>
@@ -22801,7 +22851,7 @@
                 <a:ea typeface="Verdana"/>
                 <a:cs typeface="Verdana"/>
               </a:rPr>
-              <a:t>Связать железо и софт в один эффект (железо без учёта = полка); предложить старт с минимального контура; варианты финансирования (этапы, рассрочка, перенос части в OPEX); зафиксировать слот команды и дорожную карту «железо + 1С».</a:t>
+              <a:t>Показать, что ТСД без контура учёта = дорогая полка; предложить минимальный контур “склад+цех”; варианты финансирования (этапы, перенос в OPEX, рассрочка); забронировать слот команды и созвон с финдиром.</a:t>
             </a:r>
           </a:p>
         </p:txBody>
@@ -23170,8 +23220,8 @@
         </p:nvSpPr>
         <p:spPr>
           <a:xfrm>
-            <a:off x="502920" y="1097280"/>
-            <a:ext cx="8778240" cy="3063240"/>
+            <a:off x="502920" y="1051560"/>
+            <a:ext cx="8778240" cy="3246120"/>
           </a:xfrm>
           <a:prstGeom prst="roundRect">
             <a:avLst>
@@ -23200,7 +23250,7 @@
           </a:fontRef>
         </p:style>
         <p:txBody>
-          <a:bodyPr rtlCol="0" anchor="t" wrap="square" lIns="137160" rIns="137160" tIns="91440"/>
+          <a:bodyPr rtlCol="0" anchor="t" wrap="square" lIns="128016" rIns="128016" tIns="73152" bIns="73152"/>
           <a:lstStyle/>
           <a:p>
             <a:pPr algn="l"/>
@@ -23219,11 +23269,11 @@
           <a:p>
             <a:pPr algn="l">
               <a:spcBef>
-                <a:spcPts val="600"/>
+                <a:spcPts val="500"/>
               </a:spcBef>
             </a:pPr>
             <a:r>
-              <a:rPr sz="1300" b="0">
+              <a:rPr sz="1200" b="0">
                 <a:solidFill>
                   <a:srgbClr val="FFFFFF"/>
                 </a:solidFill>
@@ -23231,17 +23281,19 @@
                 <a:ea typeface="Verdana"/>
                 <a:cs typeface="Verdana"/>
               </a:rPr>
-              <a:t>Торговая компания устала от Excel и хочет перейти на 1С:УТ: продажи, склад, взаиморасчёты. ЛПР — коммерческий директор, сравнил вас с другим интегратором.</a:t>
+              <a:t>Компания: ТД «ВостокОпт» — B2B-дистрибуция стройматериалов, 80 менеджеров и кладовщиков, филиал в Улан-Удэ.
+ЛПР на встрече: Сергей Никитин, коммерческий директор.
+Ситуация: Excel по заказам и отсрочкам не выдерживает рост. Сергей хочет 1С:УТ “под ключ”. Вы провели демо, он сравнил ваше КП с другим интегратором.</a:t>
             </a:r>
           </a:p>
           <a:p>
             <a:pPr algn="l">
               <a:spcBef>
-                <a:spcPts val="600"/>
+                <a:spcPts val="500"/>
               </a:spcBef>
             </a:pPr>
             <a:r>
-              <a:rPr sz="1300" b="0">
+              <a:rPr sz="1200" b="0">
                 <a:solidFill>
                   <a:srgbClr val="FFFFFF"/>
                 </a:solidFill>
@@ -23249,7 +23301,7 @@
                 <a:ea typeface="Verdana"/>
                 <a:cs typeface="Verdana"/>
               </a:rPr>
-              <a:t>Возражение: «У конкурента нашли предложение на 40% дешевле».</a:t>
+              <a:t>Возражение Сергея: «У них на 40% дешевле. Объясните, почему я должен переплачивать именно вам».</a:t>
             </a:r>
           </a:p>
         </p:txBody>
@@ -23262,8 +23314,8 @@
         </p:nvSpPr>
         <p:spPr>
           <a:xfrm>
-            <a:off x="640080" y="4251960"/>
-            <a:ext cx="8503920" cy="411480"/>
+            <a:off x="640080" y="4370832"/>
+            <a:ext cx="8503920" cy="365760"/>
           </a:xfrm>
           <a:prstGeom prst="rect">
             <a:avLst/>
@@ -23278,7 +23330,7 @@
           <a:p>
             <a:pPr algn="l"/>
             <a:r>
-              <a:rPr sz="1200" b="1">
+              <a:rPr sz="1100" b="1">
                 <a:solidFill>
                   <a:srgbClr val="F0B42E"/>
                 </a:solidFill>
@@ -23286,7 +23338,7 @@
                 <a:ea typeface="Verdana"/>
                 <a:cs typeface="Verdana"/>
               </a:rPr>
-              <a:t>Задача: Отработайте сравнение и доведите до выбора вашего предложения.</a:t>
+              <a:t>Задача: Отработайте сравнение с более дешёвым КП и приведите к выбору вас.</a:t>
             </a:r>
           </a:p>
         </p:txBody>
@@ -23299,8 +23351,8 @@
         </p:nvSpPr>
         <p:spPr>
           <a:xfrm>
-            <a:off x="502920" y="4709160"/>
-            <a:ext cx="8778240" cy="1325880"/>
+            <a:off x="502920" y="4754880"/>
+            <a:ext cx="8778240" cy="1234440"/>
           </a:xfrm>
           <a:prstGeom prst="roundRect">
             <a:avLst>
@@ -23360,7 +23412,7 @@
                 <a:ea typeface="Verdana"/>
                 <a:cs typeface="Verdana"/>
               </a:rPr>
-              <a:t>Сверить состав работ «яблоко к яблоку» (объём, роли, обучение, гарантия, SLA); показать риски дешёвого внедрения; предложить ценность/этапы, а не войну скидок; дать сравнительную таблицу.</a:t>
+              <a:t>Сверить состав “яблоко к яблоку” (объём, роли, обучение, гарантия, SLA); показать риски дешёвого внедрения; предложить ценность/этапы, не гонку скидок; дать сравнительную таблицу и критерий решения.</a:t>
             </a:r>
           </a:p>
         </p:txBody>
@@ -23729,8 +23781,8 @@
         </p:nvSpPr>
         <p:spPr>
           <a:xfrm>
-            <a:off x="502920" y="1097280"/>
-            <a:ext cx="8778240" cy="3063240"/>
+            <a:off x="502920" y="1051560"/>
+            <a:ext cx="8778240" cy="3246120"/>
           </a:xfrm>
           <a:prstGeom prst="roundRect">
             <a:avLst>
@@ -23759,7 +23811,7 @@
           </a:fontRef>
         </p:style>
         <p:txBody>
-          <a:bodyPr rtlCol="0" anchor="t" wrap="square" lIns="137160" rIns="137160" tIns="91440"/>
+          <a:bodyPr rtlCol="0" anchor="t" wrap="square" lIns="128016" rIns="128016" tIns="73152" bIns="73152"/>
           <a:lstStyle/>
           <a:p>
             <a:pPr algn="l"/>
@@ -23778,11 +23830,11 @@
           <a:p>
             <a:pPr algn="l">
               <a:spcBef>
-                <a:spcPts val="600"/>
+                <a:spcPts val="500"/>
               </a:spcBef>
             </a:pPr>
             <a:r>
-              <a:rPr sz="1300" b="0">
+              <a:rPr sz="1100" b="0">
                 <a:solidFill>
                   <a:srgbClr val="FFFFFF"/>
                 </a:solidFill>
@@ -23790,17 +23842,19 @@
                 <a:ea typeface="Verdana"/>
                 <a:cs typeface="Verdana"/>
               </a:rPr>
-              <a:t>Средний оптовик готов внедрять 1С:УТ, сумма и сроки согласованы. На финале финдир меняет модель оплаты.</a:t>
+              <a:t>Компания: ГК «АртЛайн» — сеть салонов мебели (6 юрлиц), оборот средний+.
+ЛПР на встрече: Марина Орлова, финдиректор группы.
+Ситуация: цена и сроки внедрения 1С:УТ согласованы с коммерцией. На финале Марина меняет модель: хочет купить лицензии сама «у знакомого за полцены», а вам оплатить только работы. При этом просит гарантию на весь контур и сопровождение “как будто лицензии тоже ваши”.</a:t>
             </a:r>
           </a:p>
           <a:p>
             <a:pPr algn="l">
               <a:spcBef>
-                <a:spcPts val="600"/>
+                <a:spcPts val="500"/>
               </a:spcBef>
             </a:pPr>
             <a:r>
-              <a:rPr sz="1300" b="0">
+              <a:rPr sz="1100" b="0">
                 <a:solidFill>
                   <a:srgbClr val="FFFFFF"/>
                 </a:solidFill>
@@ -23808,7 +23862,7 @@
                 <a:ea typeface="Verdana"/>
                 <a:cs typeface="Verdana"/>
               </a:rPr>
-              <a:t>Возражение: «Платим только после запуска в прод, без аванса и без оплаты лицензий до go-live — иначе не подписываем».</a:t>
+              <a:t>Возражение Марины: «Лицензии купим сами дешевле. Вы делайте внедрение и отвечайте за результат — иначе пойдём к тем, кто согласится».</a:t>
             </a:r>
           </a:p>
         </p:txBody>
@@ -23821,8 +23875,8 @@
         </p:nvSpPr>
         <p:spPr>
           <a:xfrm>
-            <a:off x="640080" y="4251960"/>
-            <a:ext cx="8503920" cy="411480"/>
+            <a:off x="640080" y="4370832"/>
+            <a:ext cx="8503920" cy="365760"/>
           </a:xfrm>
           <a:prstGeom prst="rect">
             <a:avLst/>
@@ -23837,7 +23891,7 @@
           <a:p>
             <a:pPr algn="l"/>
             <a:r>
-              <a:rPr sz="1200" b="1">
+              <a:rPr sz="1100" b="1">
                 <a:solidFill>
                   <a:srgbClr val="F0B42E"/>
                 </a:solidFill>
@@ -23845,7 +23899,7 @@
                 <a:ea typeface="Verdana"/>
                 <a:cs typeface="Verdana"/>
               </a:rPr>
-              <a:t>Задача: Отработайте условие оплаты и приведите к подписанию договора.</a:t>
+              <a:t>Задача: Отработайте схему «серые/чужие лицензии + ваша ответственность» и закройте сделку на безопасных условиях.</a:t>
             </a:r>
           </a:p>
         </p:txBody>
@@ -23858,8 +23912,8 @@
         </p:nvSpPr>
         <p:spPr>
           <a:xfrm>
-            <a:off x="502920" y="4709160"/>
-            <a:ext cx="8778240" cy="1325880"/>
+            <a:off x="502920" y="4754880"/>
+            <a:ext cx="8778240" cy="1234440"/>
           </a:xfrm>
           <a:prstGeom prst="roundRect">
             <a:avLst>
@@ -23919,7 +23973,7 @@
                 <a:ea typeface="Verdana"/>
                 <a:cs typeface="Verdana"/>
               </a:rPr>
-              <a:t>Объяснить, почему лицензии и команда требуют аванса/этапов; предложить поэтапную оплату по вехам (обследование / НФТ / запуск); ограниченный пилот с понятной предоплатой; не брать 100% постфактум.</a:t>
+              <a:t>Объяснить риски поддержки и обновлений без вашей поставки лицензий; разделить ответственность письменно; предложить пакет “лицензии у вас + работы” со скидкой за комплекс; не брать гарантию на чужой контур.</a:t>
             </a:r>
           </a:p>
         </p:txBody>
@@ -24288,8 +24342,8 @@
         </p:nvSpPr>
         <p:spPr>
           <a:xfrm>
-            <a:off x="502920" y="1097280"/>
-            <a:ext cx="8778240" cy="3063240"/>
+            <a:off x="502920" y="1051560"/>
+            <a:ext cx="8778240" cy="3246120"/>
           </a:xfrm>
           <a:prstGeom prst="roundRect">
             <a:avLst>
@@ -24318,7 +24372,7 @@
           </a:fontRef>
         </p:style>
         <p:txBody>
-          <a:bodyPr rtlCol="0" anchor="t" wrap="square" lIns="137160" rIns="137160" tIns="91440"/>
+          <a:bodyPr rtlCol="0" anchor="t" wrap="square" lIns="128016" rIns="128016" tIns="73152" bIns="73152"/>
           <a:lstStyle/>
           <a:p>
             <a:pPr algn="l"/>
@@ -24337,11 +24391,11 @@
           <a:p>
             <a:pPr algn="l">
               <a:spcBef>
-                <a:spcPts val="600"/>
+                <a:spcPts val="500"/>
               </a:spcBef>
             </a:pPr>
             <a:r>
-              <a:rPr sz="1300" b="0">
+              <a:rPr sz="1200" b="0">
                 <a:solidFill>
                   <a:srgbClr val="FFFFFF"/>
                 </a:solidFill>
@@ -24349,17 +24403,19 @@
                 <a:ea typeface="Verdana"/>
                 <a:cs typeface="Verdana"/>
               </a:rPr>
-              <a:t>Крупный клиент хочет 1С и сопровождение на 3 года: развитие, обновления, линия поддержки. Юристы уже в сделке.</a:t>
+              <a:t>Компания: «БайкалРитейл» — региональная сеть (18 магазинов), ИТ-бюджет централизован.
+ЛПР на встрече: Олег Савельев, CIO; на созвоне также юрист компании.
+Ситуация: хотят 1С + сопровождение 3 года (развитие, обновления, L2/L3). Сумма устраивает бизнес, но договор упирается в формулировки ответственности.</a:t>
             </a:r>
           </a:p>
           <a:p>
             <a:pPr algn="l">
               <a:spcBef>
-                <a:spcPts val="600"/>
+                <a:spcPts val="500"/>
               </a:spcBef>
             </a:pPr>
             <a:r>
-              <a:rPr sz="1300" b="0">
+              <a:rPr sz="1200" b="0">
                 <a:solidFill>
                   <a:srgbClr val="FFFFFF"/>
                 </a:solidFill>
@@ -24367,7 +24423,7 @@
                 <a:ea typeface="Verdana"/>
                 <a:cs typeface="Verdana"/>
               </a:rPr>
-              <a:t>Возражение: «Оплатим только если гарантируете окупаемость; иначе — штраф в договоре».</a:t>
+              <a:t>Возражение Олега/юриста: «Оплатим контракт только если в договоре будет гарантия окупаемости проекта. Не окупится — штраф и возврат денег».</a:t>
             </a:r>
           </a:p>
         </p:txBody>
@@ -24380,8 +24436,8 @@
         </p:nvSpPr>
         <p:spPr>
           <a:xfrm>
-            <a:off x="640080" y="4251960"/>
-            <a:ext cx="8503920" cy="411480"/>
+            <a:off x="640080" y="4370832"/>
+            <a:ext cx="8503920" cy="365760"/>
           </a:xfrm>
           <a:prstGeom prst="rect">
             <a:avLst/>
@@ -24396,7 +24452,7 @@
           <a:p>
             <a:pPr algn="l"/>
             <a:r>
-              <a:rPr sz="1200" b="1">
+              <a:rPr sz="1100" b="1">
                 <a:solidFill>
                   <a:srgbClr val="F0B42E"/>
                 </a:solidFill>
@@ -24404,7 +24460,7 @@
                 <a:ea typeface="Verdana"/>
                 <a:cs typeface="Verdana"/>
               </a:rPr>
-              <a:t>Задача: Отработайте требование гарантии окупаемости и закройте сделку.</a:t>
+              <a:t>Задача: Снимите требование “штраф за ROI” и приведите к подписанию управляемого договора.</a:t>
             </a:r>
           </a:p>
         </p:txBody>
@@ -24417,8 +24473,8 @@
         </p:nvSpPr>
         <p:spPr>
           <a:xfrm>
-            <a:off x="502920" y="4709160"/>
-            <a:ext cx="8778240" cy="1325880"/>
+            <a:off x="502920" y="4754880"/>
+            <a:ext cx="8778240" cy="1234440"/>
           </a:xfrm>
           <a:prstGeom prst="roundRect">
             <a:avLst>
@@ -24478,7 +24534,7 @@
                 <a:ea typeface="Verdana"/>
                 <a:cs typeface="Verdana"/>
               </a:rPr>
-              <a:t>Отделить ответственность за внедрение от бизнес-ROI клиента; предложить KPI проекта (сроки, качество, SLA), а не «штраф за прибыль»; совместный расчёт эффекта; пилот с измеримыми метриками.</a:t>
+              <a:t>Отделить ответственность за внедрение/SLA от бизнес-ROI клиента; предложить KPI проекта (сроки, качество, доступность); совместный расчёт эффекта; пилот с метриками вместо штрафной окупаемости.</a:t>
             </a:r>
           </a:p>
         </p:txBody>
@@ -24847,8 +24903,8 @@
         </p:nvSpPr>
         <p:spPr>
           <a:xfrm>
-            <a:off x="502920" y="1097280"/>
-            <a:ext cx="8778240" cy="3063240"/>
+            <a:off x="502920" y="1051560"/>
+            <a:ext cx="8778240" cy="3246120"/>
           </a:xfrm>
           <a:prstGeom prst="roundRect">
             <a:avLst>
@@ -24877,7 +24933,7 @@
           </a:fontRef>
         </p:style>
         <p:txBody>
-          <a:bodyPr rtlCol="0" anchor="t" wrap="square" lIns="137160" rIns="137160" tIns="91440"/>
+          <a:bodyPr rtlCol="0" anchor="t" wrap="square" lIns="128016" rIns="128016" tIns="73152" bIns="73152"/>
           <a:lstStyle/>
           <a:p>
             <a:pPr algn="l"/>
@@ -24896,11 +24952,11 @@
           <a:p>
             <a:pPr algn="l">
               <a:spcBef>
-                <a:spcPts val="600"/>
+                <a:spcPts val="500"/>
               </a:spcBef>
             </a:pPr>
             <a:r>
-              <a:rPr sz="1300" b="0">
+              <a:rPr sz="1200" b="0">
                 <a:solidFill>
                   <a:srgbClr val="FFFFFF"/>
                 </a:solidFill>
@@ -24908,17 +24964,19 @@
                 <a:ea typeface="Verdana"/>
                 <a:cs typeface="Verdana"/>
               </a:rPr>
-              <a:t>Финдиректор холдинга готов автоматизировать закрытие месяца на базе 1С. Без его подписи сделка не двигается.</a:t>
+              <a:t>Компания: холдинг «ЕнисейИнвест» — 4 производственных площадки + УК.
+ЛПР на встрече: Елена Морозова, финансовый директор холдинга.
+Ситуация: закрытие месяца занимает 12–14 рабочих дней, постоянные ручные корректировки. Елена готова рассматривать 1С:ERP/УХ-контур под ускорение close, но без её подписи сделка мертва. Совет директоров просит “цифры, а не красивые слайды”.</a:t>
             </a:r>
           </a:p>
           <a:p>
             <a:pPr algn="l">
               <a:spcBef>
-                <a:spcPts val="600"/>
+                <a:spcPts val="500"/>
               </a:spcBef>
             </a:pPr>
             <a:r>
-              <a:rPr sz="1300" b="0">
+              <a:rPr sz="1200" b="0">
                 <a:solidFill>
                   <a:srgbClr val="FFFFFF"/>
                 </a:solidFill>
@@ -24926,7 +24984,7 @@
                 <a:ea typeface="Verdana"/>
                 <a:cs typeface="Verdana"/>
               </a:rPr>
-              <a:t>Возражение: «Покажите ROI за 6 месяцев цифрами, иначе не подпишу».</a:t>
+              <a:t>Возражение Елены: «Покажите ROI за 6 месяцев в цифрах по нашим данным. Без модели — даже на пилот не подпишу».</a:t>
             </a:r>
           </a:p>
         </p:txBody>
@@ -24939,8 +24997,8 @@
         </p:nvSpPr>
         <p:spPr>
           <a:xfrm>
-            <a:off x="640080" y="4251960"/>
-            <a:ext cx="8503920" cy="411480"/>
+            <a:off x="640080" y="4370832"/>
+            <a:ext cx="8503920" cy="365760"/>
           </a:xfrm>
           <a:prstGeom prst="rect">
             <a:avLst/>
@@ -24955,7 +25013,7 @@
           <a:p>
             <a:pPr algn="l"/>
             <a:r>
-              <a:rPr sz="1200" b="1">
+              <a:rPr sz="1100" b="1">
                 <a:solidFill>
                   <a:srgbClr val="F0B42E"/>
                 </a:solidFill>
@@ -24963,7 +25021,7 @@
                 <a:ea typeface="Verdana"/>
                 <a:cs typeface="Verdana"/>
               </a:rPr>
-              <a:t>Задача: Соберите аргументацию ROI и приведите к подписанию.</a:t>
+              <a:t>Задача: Соберите ROI-аргументацию на их цифрах и выведите на подписание следующего шага.</a:t>
             </a:r>
           </a:p>
         </p:txBody>
@@ -24976,8 +25034,8 @@
         </p:nvSpPr>
         <p:spPr>
           <a:xfrm>
-            <a:off x="502920" y="4709160"/>
-            <a:ext cx="8778240" cy="1325880"/>
+            <a:off x="502920" y="4754880"/>
+            <a:ext cx="8778240" cy="1234440"/>
           </a:xfrm>
           <a:prstGeom prst="roundRect">
             <a:avLst>
@@ -25037,7 +25095,7 @@
                 <a:ea typeface="Verdana"/>
                 <a:cs typeface="Verdana"/>
               </a:rPr>
-              <a:t>Запросить исходные цифры (FTE на закрытие, ошибки, пени, дни soft close); построить модель «как есть / как будет»; консервативный сценарий на 6–12 мес.; предложить этап с быстрым эффектом (регламент + отчёты).</a:t>
+              <a:t>Запросить FTE на close, ошибки, пени, дни soft close; модель as-is/to-be; консервативный сценарий 6–12 мес.; этап с быстрым эффектом (регламент + пакет отчётов) как вход в сделку.</a:t>
             </a:r>
           </a:p>
         </p:txBody>
@@ -25406,8 +25464,8 @@
         </p:nvSpPr>
         <p:spPr>
           <a:xfrm>
-            <a:off x="502920" y="1097280"/>
-            <a:ext cx="8778240" cy="3063240"/>
+            <a:off x="502920" y="1051560"/>
+            <a:ext cx="8778240" cy="3246120"/>
           </a:xfrm>
           <a:prstGeom prst="roundRect">
             <a:avLst>
@@ -25436,7 +25494,7 @@
           </a:fontRef>
         </p:style>
         <p:txBody>
-          <a:bodyPr rtlCol="0" anchor="t" wrap="square" lIns="137160" rIns="137160" tIns="91440"/>
+          <a:bodyPr rtlCol="0" anchor="t" wrap="square" lIns="128016" rIns="128016" tIns="73152" bIns="73152"/>
           <a:lstStyle/>
           <a:p>
             <a:pPr algn="l"/>
@@ -25455,11 +25513,11 @@
           <a:p>
             <a:pPr algn="l">
               <a:spcBef>
-                <a:spcPts val="600"/>
+                <a:spcPts val="500"/>
               </a:spcBef>
             </a:pPr>
             <a:r>
-              <a:rPr sz="1300" b="0">
+              <a:rPr sz="1200" b="0">
                 <a:solidFill>
                   <a:srgbClr val="FFFFFF"/>
                 </a:solidFill>
@@ -25467,17 +25525,19 @@
                 <a:ea typeface="Verdana"/>
                 <a:cs typeface="Verdana"/>
               </a:rPr>
-              <a:t>ООО хочет электронный документооборот, связанный с 1С: меньше бумаги и ручной разноски. Встреча прошла тепло.</a:t>
+              <a:t>Компания: ООО «Логистика Плюс» — перевозки по Сибири, 60 сотрудников.
+ЛПР на встрече: Наталья Ершова, исполнительный директор.
+Ситуация: тонут в бумажных УПД и актах, хотят ЭДО, связанный с 1С. Встреча прошла тепло, Наталья кивала на болях “задержки оплат из‑за документов”.</a:t>
             </a:r>
           </a:p>
           <a:p>
             <a:pPr algn="l">
               <a:spcBef>
-                <a:spcPts val="600"/>
+                <a:spcPts val="500"/>
               </a:spcBef>
             </a:pPr>
             <a:r>
-              <a:rPr sz="1300" b="0">
+              <a:rPr sz="1200" b="0">
                 <a:solidFill>
                   <a:srgbClr val="FFFFFF"/>
                 </a:solidFill>
@@ -25485,7 +25545,7 @@
                 <a:ea typeface="Verdana"/>
                 <a:cs typeface="Verdana"/>
               </a:rPr>
-              <a:t>Возражение: «Напишите КП на почту, мы подумаем».</a:t>
+              <a:t>Возражение Натальи в конце: «Напишите КП на почту, мы подумаем с бухгалтерией».</a:t>
             </a:r>
           </a:p>
         </p:txBody>
@@ -25498,8 +25558,8 @@
         </p:nvSpPr>
         <p:spPr>
           <a:xfrm>
-            <a:off x="640080" y="4251960"/>
-            <a:ext cx="8503920" cy="411480"/>
+            <a:off x="640080" y="4370832"/>
+            <a:ext cx="8503920" cy="365760"/>
           </a:xfrm>
           <a:prstGeom prst="rect">
             <a:avLst/>
@@ -25514,7 +25574,7 @@
           <a:p>
             <a:pPr algn="l"/>
             <a:r>
-              <a:rPr sz="1200" b="1">
+              <a:rPr sz="1100" b="1">
                 <a:solidFill>
                   <a:srgbClr val="F0B42E"/>
                 </a:solidFill>
@@ -25522,7 +25582,7 @@
                 <a:ea typeface="Verdana"/>
                 <a:cs typeface="Verdana"/>
               </a:rPr>
-              <a:t>Задача: Не потеряйте сделку на «КП на почту» — доведите до конкретного шага.</a:t>
+              <a:t>Задача: Не дайте сделке умереть в “КП на почту” — зафиксируйте конкретный следующий шаг.</a:t>
             </a:r>
           </a:p>
         </p:txBody>
@@ -25535,8 +25595,8 @@
         </p:nvSpPr>
         <p:spPr>
           <a:xfrm>
-            <a:off x="502920" y="4709160"/>
-            <a:ext cx="8778240" cy="1325880"/>
+            <a:off x="502920" y="4754880"/>
+            <a:ext cx="8778240" cy="1234440"/>
           </a:xfrm>
           <a:prstGeom prst="roundRect">
             <a:avLst>
@@ -25596,7 +25656,7 @@
                 <a:ea typeface="Verdana"/>
                 <a:cs typeface="Verdana"/>
               </a:rPr>
-              <a:t>Уточнить, что именно сравнят и с кем; предложить короткий созвон разбора КП; зафиксировать дату и критерий решения; добавить в КП следующий шаг (демо/аудит), а не «просто цены».</a:t>
+              <a:t>Уточнить критерии сравнения и круг согласующих; предложить созвон разбора КП; дата ответа; в КП сразу зашить демо/аудит как следующий шаг.</a:t>
             </a:r>
           </a:p>
         </p:txBody>
